--- a/templates/deck.pptx
+++ b/templates/deck.pptx
@@ -138,7 +138,7 @@
       </p:grpSpPr>
       <p:sp>
         <p:nvSpPr>
-          <p:cNvPr id="463328867" name="Header Placeholder 1"/>
+          <p:cNvPr id="1301524969" name="Header Placeholder 1"/>
           <p:cNvSpPr>
             <a:spLocks noGrp="1"/>
           </p:cNvSpPr>
@@ -172,7 +172,7 @@
       </p:sp>
       <p:sp>
         <p:nvSpPr>
-          <p:cNvPr id="770503713" name="Date Placeholder 2"/>
+          <p:cNvPr id="62087049" name="Date Placeholder 2"/>
           <p:cNvSpPr>
             <a:spLocks noGrp="1"/>
           </p:cNvSpPr>
@@ -210,7 +210,7 @@
       </p:sp>
       <p:sp>
         <p:nvSpPr>
-          <p:cNvPr id="1495990734" name="Slide Image Placeholder 3"/>
+          <p:cNvPr id="1458043493" name="Slide Image Placeholder 3"/>
           <p:cNvSpPr>
             <a:spLocks noChangeAspect="1" noGrp="1" noRot="1"/>
           </p:cNvSpPr>
@@ -246,7 +246,7 @@
       </p:sp>
       <p:sp>
         <p:nvSpPr>
-          <p:cNvPr id="1249700317" name="Notes Placeholder 4"/>
+          <p:cNvPr id="1525086573" name="Notes Placeholder 4"/>
           <p:cNvSpPr>
             <a:spLocks noGrp="1"/>
           </p:cNvSpPr>
@@ -320,7 +320,7 @@
       </p:sp>
       <p:sp>
         <p:nvSpPr>
-          <p:cNvPr id="511223140" name="Footer Placeholder 5"/>
+          <p:cNvPr id="921916788" name="Footer Placeholder 5"/>
           <p:cNvSpPr>
             <a:spLocks noGrp="1"/>
           </p:cNvSpPr>
@@ -354,7 +354,7 @@
       </p:sp>
       <p:sp>
         <p:nvSpPr>
-          <p:cNvPr id="1158128243" name="Slide Number Placeholder 6"/>
+          <p:cNvPr id="564513752" name="Slide Number Placeholder 6"/>
           <p:cNvSpPr>
             <a:spLocks noGrp="1"/>
           </p:cNvSpPr>
@@ -508,7 +508,7 @@
       </p:grpSpPr>
       <p:sp>
         <p:nvSpPr>
-          <p:cNvPr id="1667459968" name="Slide Image Placeholder 1"/>
+          <p:cNvPr id="1880852339" name="Slide Image Placeholder 1"/>
           <p:cNvSpPr>
             <a:spLocks noChangeAspect="1" noGrp="1" noRot="1"/>
           </p:cNvSpPr>
@@ -525,7 +525,7 @@
       </p:sp>
       <p:sp>
         <p:nvSpPr>
-          <p:cNvPr id="2039998749" name="Notes Placeholder 2"/>
+          <p:cNvPr id="66227231" name="Notes Placeholder 2"/>
           <p:cNvSpPr>
             <a:spLocks noGrp="1"/>
           </p:cNvSpPr>
@@ -550,7 +550,7 @@
       </p:sp>
       <p:sp>
         <p:nvSpPr>
-          <p:cNvPr id="1046570907" name="Slide Number Placeholder 3"/>
+          <p:cNvPr id="154986018" name="Slide Number Placeholder 3"/>
           <p:cNvSpPr>
             <a:spLocks noGrp="1"/>
           </p:cNvSpPr>
@@ -601,7 +601,7 @@
       </p:grpSpPr>
       <p:sp>
         <p:nvSpPr>
-          <p:cNvPr id="1113495142" name="Slide Image Placeholder 1"/>
+          <p:cNvPr id="359927537" name="Slide Image Placeholder 1"/>
           <p:cNvSpPr>
             <a:spLocks noChangeAspect="1" noGrp="1" noRot="1"/>
           </p:cNvSpPr>
@@ -613,7 +613,7 @@
       </p:sp>
       <p:sp>
         <p:nvSpPr>
-          <p:cNvPr id="1771338041" name="Notes Placeholder 2"/>
+          <p:cNvPr id="828639689" name="Notes Placeholder 2"/>
           <p:cNvSpPr>
             <a:spLocks noGrp="1"/>
           </p:cNvSpPr>
@@ -635,7 +635,7 @@
       </p:sp>
       <p:sp>
         <p:nvSpPr>
-          <p:cNvPr id="1498846187" name="Slide Number Placeholder 3"/>
+          <p:cNvPr id="1844446614" name="Slide Number Placeholder 3"/>
           <p:cNvSpPr>
             <a:spLocks noGrp="1"/>
           </p:cNvSpPr>
@@ -686,7 +686,7 @@
       </p:grpSpPr>
       <p:sp>
         <p:nvSpPr>
-          <p:cNvPr id="8148904" name="Slide Image Placeholder 1"/>
+          <p:cNvPr id="1531891188" name="Slide Image Placeholder 1"/>
           <p:cNvSpPr>
             <a:spLocks noChangeAspect="1" noGrp="1" noRot="1"/>
           </p:cNvSpPr>
@@ -698,7 +698,7 @@
       </p:sp>
       <p:sp>
         <p:nvSpPr>
-          <p:cNvPr id="366691802" name="Notes Placeholder 2"/>
+          <p:cNvPr id="1176411184" name="Notes Placeholder 2"/>
           <p:cNvSpPr>
             <a:spLocks noGrp="1"/>
           </p:cNvSpPr>
@@ -720,7 +720,7 @@
       </p:sp>
       <p:sp>
         <p:nvSpPr>
-          <p:cNvPr id="1792424974" name="Slide Number Placeholder 3"/>
+          <p:cNvPr id="655615717" name="Slide Number Placeholder 3"/>
           <p:cNvSpPr>
             <a:spLocks noGrp="1"/>
           </p:cNvSpPr>
@@ -771,7 +771,7 @@
       </p:grpSpPr>
       <p:sp>
         <p:nvSpPr>
-          <p:cNvPr id="1073641079" name="Slide Image Placeholder 1"/>
+          <p:cNvPr id="157678718" name="Slide Image Placeholder 1"/>
           <p:cNvSpPr>
             <a:spLocks noChangeAspect="1" noGrp="1" noRot="1"/>
           </p:cNvSpPr>
@@ -783,7 +783,7 @@
       </p:sp>
       <p:sp>
         <p:nvSpPr>
-          <p:cNvPr id="1629980016" name="Notes Placeholder 2"/>
+          <p:cNvPr id="286066249" name="Notes Placeholder 2"/>
           <p:cNvSpPr>
             <a:spLocks noGrp="1"/>
           </p:cNvSpPr>
@@ -805,7 +805,7 @@
       </p:sp>
       <p:sp>
         <p:nvSpPr>
-          <p:cNvPr id="254365440" name="Slide Number Placeholder 3"/>
+          <p:cNvPr id="305173000" name="Slide Number Placeholder 3"/>
           <p:cNvSpPr>
             <a:spLocks noGrp="1"/>
           </p:cNvSpPr>
@@ -856,7 +856,7 @@
       </p:grpSpPr>
       <p:sp>
         <p:nvSpPr>
-          <p:cNvPr id="1685454754" name="Slide Image Placeholder 1"/>
+          <p:cNvPr id="908056674" name="Slide Image Placeholder 1"/>
           <p:cNvSpPr>
             <a:spLocks noChangeAspect="1" noGrp="1" noRot="1"/>
           </p:cNvSpPr>
@@ -868,7 +868,7 @@
       </p:sp>
       <p:sp>
         <p:nvSpPr>
-          <p:cNvPr id="2033701767" name="Notes Placeholder 2"/>
+          <p:cNvPr id="1774066913" name="Notes Placeholder 2"/>
           <p:cNvSpPr>
             <a:spLocks noGrp="1"/>
           </p:cNvSpPr>
@@ -890,7 +890,7 @@
       </p:sp>
       <p:sp>
         <p:nvSpPr>
-          <p:cNvPr id="284645881" name="Slide Number Placeholder 3"/>
+          <p:cNvPr id="710903706" name="Slide Number Placeholder 3"/>
           <p:cNvSpPr>
             <a:spLocks noGrp="1"/>
           </p:cNvSpPr>
@@ -941,7 +941,7 @@
       </p:grpSpPr>
       <p:sp>
         <p:nvSpPr>
-          <p:cNvPr id="828498937" name="Rectangle 1245485961"/>
+          <p:cNvPr id="1903481793" name="Rectangle 1245485961"/>
           <p:cNvSpPr/>
           <p:nvPr/>
         </p:nvSpPr>
@@ -981,7 +981,7 @@
       </p:sp>
       <p:cxnSp>
         <p:nvCxnSpPr>
-          <p:cNvPr id="1697149976" name=""/>
+          <p:cNvPr id="2080441653" name=""/>
           <p:cNvCxnSpPr/>
           <p:nvPr/>
         </p:nvCxnSpPr>
@@ -1020,7 +1020,7 @@
       </p:cxnSp>
       <p:sp>
         <p:nvSpPr>
-          <p:cNvPr id="1324544210" name="Title 1"/>
+          <p:cNvPr id="743833349" name="Title 1"/>
           <p:cNvSpPr>
             <a:spLocks noGrp="1"/>
           </p:cNvSpPr>
@@ -1115,7 +1115,7 @@
       </p:sp>
       <p:sp>
         <p:nvSpPr>
-          <p:cNvPr id="1352638564" name="Subtitle 2"/>
+          <p:cNvPr id="1329070098" name="Subtitle 2"/>
           <p:cNvSpPr>
             <a:spLocks noGrp="1"/>
           </p:cNvSpPr>
@@ -1244,7 +1244,7 @@
       </p:grpSpPr>
       <p:sp>
         <p:nvSpPr>
-          <p:cNvPr id="1909393669" name="Title 1"/>
+          <p:cNvPr id="1661020164" name="Title 1"/>
           <p:cNvSpPr>
             <a:spLocks noGrp="1"/>
           </p:cNvSpPr>
@@ -1341,7 +1341,7 @@
       </p:sp>
       <p:cxnSp>
         <p:nvCxnSpPr>
-          <p:cNvPr id="2057070403" name=""/>
+          <p:cNvPr id="1987771041" name=""/>
           <p:cNvCxnSpPr/>
           <p:nvPr/>
         </p:nvCxnSpPr>
@@ -1380,7 +1380,7 @@
       </p:cxnSp>
       <p:sp>
         <p:nvSpPr>
-          <p:cNvPr id="25799897" name="Footer Placeholder 4"/>
+          <p:cNvPr id="2088382541" name="Footer Placeholder 4"/>
           <p:cNvSpPr>
             <a:spLocks noGrp="1"/>
           </p:cNvSpPr>
@@ -1448,7 +1448,7 @@
       </p:sp>
       <p:sp>
         <p:nvSpPr>
-          <p:cNvPr id="476721899" name="Slide Number Placeholder 5"/>
+          <p:cNvPr id="696554200" name="Slide Number Placeholder 5"/>
           <p:cNvSpPr>
             <a:spLocks noGrp="1"/>
           </p:cNvSpPr>
@@ -1517,7 +1517,7 @@
       </p:grpSpPr>
       <p:sp>
         <p:nvSpPr>
-          <p:cNvPr id="2144126746" name="Rectangle 1245485961"/>
+          <p:cNvPr id="1494031118" name="Rectangle 1245485961"/>
           <p:cNvSpPr/>
           <p:nvPr/>
         </p:nvSpPr>
@@ -1557,7 +1557,7 @@
       </p:sp>
       <p:sp>
         <p:nvSpPr>
-          <p:cNvPr id="793368032" name="Title 1"/>
+          <p:cNvPr id="1479490369" name="Title 1"/>
           <p:cNvSpPr>
             <a:spLocks noGrp="1"/>
           </p:cNvSpPr>
@@ -1654,7 +1654,7 @@
       </p:sp>
       <p:cxnSp>
         <p:nvCxnSpPr>
-          <p:cNvPr id="1902255034" name=""/>
+          <p:cNvPr id="341934453" name=""/>
           <p:cNvCxnSpPr/>
           <p:nvPr/>
         </p:nvCxnSpPr>
@@ -1693,7 +1693,7 @@
       </p:cxnSp>
       <p:sp>
         <p:nvSpPr>
-          <p:cNvPr id="514247252" name="Footer Placeholder 4"/>
+          <p:cNvPr id="1368320010" name="Footer Placeholder 4"/>
           <p:cNvSpPr>
             <a:spLocks noGrp="1"/>
           </p:cNvSpPr>
@@ -1761,7 +1761,7 @@
       </p:sp>
       <p:sp>
         <p:nvSpPr>
-          <p:cNvPr id="342726068" name="Slide Number Placeholder 5"/>
+          <p:cNvPr id="1572753832" name="Slide Number Placeholder 5"/>
           <p:cNvSpPr>
             <a:spLocks noGrp="1"/>
           </p:cNvSpPr>
@@ -1859,7 +1859,7 @@
       </p:sp>
       <p:cxnSp>
         <p:nvCxnSpPr>
-          <p:cNvPr id="1792061818" name=""/>
+          <p:cNvPr id="873533648" name=""/>
           <p:cNvCxnSpPr/>
           <p:nvPr/>
         </p:nvCxnSpPr>
@@ -1898,7 +1898,7 @@
       </p:cxnSp>
       <p:sp>
         <p:nvSpPr>
-          <p:cNvPr id="1560426377" name="Text Placeholder 9"/>
+          <p:cNvPr id="966250286" name="Text Placeholder 9"/>
           <p:cNvSpPr>
             <a:spLocks noGrp="1"/>
           </p:cNvSpPr>
@@ -2025,7 +2025,7 @@
       </p:grpSpPr>
       <p:sp>
         <p:nvSpPr>
-          <p:cNvPr id="82883564" name="Title 1"/>
+          <p:cNvPr id="1294406083" name="Title 1"/>
           <p:cNvSpPr>
             <a:spLocks noGrp="1"/>
           </p:cNvSpPr>
@@ -2122,7 +2122,7 @@
       </p:sp>
       <p:cxnSp>
         <p:nvCxnSpPr>
-          <p:cNvPr id="848657591" name=""/>
+          <p:cNvPr id="186503788" name=""/>
           <p:cNvCxnSpPr/>
           <p:nvPr/>
         </p:nvCxnSpPr>
@@ -2161,7 +2161,7 @@
       </p:cxnSp>
       <p:sp>
         <p:nvSpPr>
-          <p:cNvPr id="1628643655" name="Footer Placeholder 4"/>
+          <p:cNvPr id="1104391929" name="Footer Placeholder 4"/>
           <p:cNvSpPr>
             <a:spLocks noGrp="1"/>
           </p:cNvSpPr>
@@ -2229,7 +2229,7 @@
       </p:sp>
       <p:cxnSp>
         <p:nvCxnSpPr>
-          <p:cNvPr id="1873895403" name=""/>
+          <p:cNvPr id="1916595883" name=""/>
           <p:cNvCxnSpPr/>
           <p:nvPr/>
         </p:nvCxnSpPr>
@@ -2268,7 +2268,7 @@
       </p:cxnSp>
       <p:sp>
         <p:nvSpPr>
-          <p:cNvPr id="34293928" name="Slide Number Placeholder 5"/>
+          <p:cNvPr id="2080041369" name="Slide Number Placeholder 5"/>
           <p:cNvSpPr>
             <a:spLocks noGrp="1"/>
           </p:cNvSpPr>
@@ -2342,7 +2342,7 @@
       </p:grpSpPr>
       <p:sp>
         <p:nvSpPr>
-          <p:cNvPr id="1346142233" name="Title Placeholder 1"/>
+          <p:cNvPr id="1648738871" name="Title Placeholder 1"/>
           <p:cNvSpPr>
             <a:spLocks noGrp="1"/>
           </p:cNvSpPr>
@@ -2378,7 +2378,7 @@
       </p:sp>
       <p:sp>
         <p:nvSpPr>
-          <p:cNvPr id="1372387337" name="Text Placeholder 2"/>
+          <p:cNvPr id="498882596" name="Text Placeholder 2"/>
           <p:cNvSpPr>
             <a:spLocks noGrp="1"/>
           </p:cNvSpPr>
@@ -2454,7 +2454,7 @@
       </p:sp>
       <p:sp>
         <p:nvSpPr>
-          <p:cNvPr id="851437094" name="Footer Placeholder 4"/>
+          <p:cNvPr id="1205183813" name="Footer Placeholder 4"/>
           <p:cNvSpPr>
             <a:spLocks noGrp="1"/>
           </p:cNvSpPr>
@@ -2522,7 +2522,7 @@
       </p:sp>
       <p:sp>
         <p:nvSpPr>
-          <p:cNvPr id="263018367" name="Slide Number Placeholder 5"/>
+          <p:cNvPr id="1596293977" name="Slide Number Placeholder 5"/>
           <p:cNvSpPr>
             <a:spLocks noGrp="1"/>
           </p:cNvSpPr>
@@ -2876,7 +2876,7 @@
       </p:grpSpPr>
       <p:sp>
         <p:nvSpPr>
-          <p:cNvPr id="1015664691" name="Title"/>
+          <p:cNvPr id="1926489679" name="Title"/>
           <p:cNvSpPr>
             <a:spLocks noGrp="1"/>
           </p:cNvSpPr>
@@ -2910,7 +2910,7 @@
       </p:sp>
       <p:sp>
         <p:nvSpPr>
-          <p:cNvPr id="1168427195" name="Subtitle"/>
+          <p:cNvPr id="1207360705" name="Subtitle"/>
           <p:cNvSpPr>
             <a:spLocks noGrp="1"/>
           </p:cNvSpPr>
@@ -2973,7 +2973,367 @@
       </p:grpSpPr>
       <p:sp>
         <p:nvSpPr>
-          <p:cNvPr id="877110904" name="Title 1"/>
+          <p:cNvPr id="987947642" name="symbol"/>
+          <p:cNvSpPr txBox="1"/>
+          <p:nvPr/>
+        </p:nvSpPr>
+        <p:spPr bwMode="auto">
+          <a:xfrm rot="0" flipH="0" flipV="0">
+            <a:off x="2235198" y="2616198"/>
+            <a:ext cx="2438400" cy="406396"/>
+          </a:xfrm>
+          <a:prstGeom prst="rect">
+            <a:avLst/>
+          </a:prstGeom>
+          <a:noFill/>
+        </p:spPr>
+        <p:txBody>
+          <a:bodyPr vertOverflow="overflow" horzOverflow="overflow" vert="horz" wrap="square" lIns="45720" tIns="45720" rIns="45720" bIns="45720" numCol="1" spcCol="0" rtlCol="0" fromWordArt="0" anchor="ctr" anchorCtr="0" forceAA="0" upright="0" compatLnSpc="0">
+            <a:noAutofit/>
+          </a:bodyPr>
+          <a:p>
+            <a:pPr algn="l">
+              <a:defRPr/>
+            </a:pPr>
+            <a:r>
+              <a:rPr lang="it-IT" sz="1600" b="1">
+                <a:solidFill>
+                  <a:schemeClr val="tx2"/>
+                </a:solidFill>
+              </a:rPr>
+              <a:t>{ticker}</a:t>
+            </a:r>
+            <a:endParaRPr sz="1600" b="1">
+              <a:solidFill>
+                <a:schemeClr val="tx2"/>
+              </a:solidFill>
+            </a:endParaRPr>
+          </a:p>
+        </p:txBody>
+      </p:sp>
+      <p:sp>
+        <p:nvSpPr>
+          <p:cNvPr id="681153151" name="sector"/>
+          <p:cNvSpPr txBox="1"/>
+          <p:nvPr/>
+        </p:nvSpPr>
+        <p:spPr bwMode="auto">
+          <a:xfrm rot="0" flipH="0" flipV="0">
+            <a:off x="2235198" y="3022598"/>
+            <a:ext cx="2438400" cy="406396"/>
+          </a:xfrm>
+          <a:prstGeom prst="rect">
+            <a:avLst/>
+          </a:prstGeom>
+          <a:noFill/>
+        </p:spPr>
+        <p:txBody>
+          <a:bodyPr vertOverflow="overflow" horzOverflow="overflow" vert="horz" wrap="square" lIns="45720" tIns="45720" rIns="45720" bIns="45720" numCol="1" spcCol="0" rtlCol="0" fromWordArt="0" anchor="ctr" anchorCtr="0" forceAA="0" upright="0" compatLnSpc="0">
+            <a:noAutofit/>
+          </a:bodyPr>
+          <a:p>
+            <a:pPr algn="l">
+              <a:defRPr/>
+            </a:pPr>
+            <a:r>
+              <a:rPr lang="it-IT" sz="1600" b="0">
+                <a:solidFill>
+                  <a:schemeClr val="tx2"/>
+                </a:solidFill>
+              </a:rPr>
+              <a:t>{sector}</a:t>
+            </a:r>
+            <a:endParaRPr sz="1600" b="0">
+              <a:solidFill>
+                <a:schemeClr val="tx2"/>
+              </a:solidFill>
+            </a:endParaRPr>
+          </a:p>
+        </p:txBody>
+      </p:sp>
+      <p:sp>
+        <p:nvSpPr>
+          <p:cNvPr id="970483222" name="market_cap"/>
+          <p:cNvSpPr txBox="1"/>
+          <p:nvPr/>
+        </p:nvSpPr>
+        <p:spPr bwMode="auto">
+          <a:xfrm rot="0" flipH="0" flipV="0">
+            <a:off x="2235198" y="3835398"/>
+            <a:ext cx="2438400" cy="406396"/>
+          </a:xfrm>
+          <a:prstGeom prst="rect">
+            <a:avLst/>
+          </a:prstGeom>
+          <a:noFill/>
+        </p:spPr>
+        <p:txBody>
+          <a:bodyPr vertOverflow="overflow" horzOverflow="overflow" vert="horz" wrap="square" lIns="45720" tIns="45720" rIns="45720" bIns="45720" numCol="1" spcCol="0" rtlCol="0" fromWordArt="0" anchor="ctr" anchorCtr="0" forceAA="0" upright="0" compatLnSpc="0">
+            <a:noAutofit/>
+          </a:bodyPr>
+          <a:p>
+            <a:pPr algn="l">
+              <a:defRPr/>
+            </a:pPr>
+            <a:r>
+              <a:rPr lang="it-IT" sz="1600" b="1">
+                <a:solidFill>
+                  <a:schemeClr val="tx2"/>
+                </a:solidFill>
+              </a:rPr>
+              <a:t>{market_cap}</a:t>
+            </a:r>
+            <a:endParaRPr sz="1600" b="1">
+              <a:solidFill>
+                <a:schemeClr val="tx2"/>
+              </a:solidFill>
+            </a:endParaRPr>
+          </a:p>
+        </p:txBody>
+      </p:sp>
+      <p:sp>
+        <p:nvSpPr>
+          <p:cNvPr id="294228884" name="share_earnings"/>
+          <p:cNvSpPr txBox="1"/>
+          <p:nvPr/>
+        </p:nvSpPr>
+        <p:spPr bwMode="auto">
+          <a:xfrm rot="0" flipH="0" flipV="0">
+            <a:off x="2235198" y="4648197"/>
+            <a:ext cx="2438400" cy="406396"/>
+          </a:xfrm>
+          <a:prstGeom prst="rect">
+            <a:avLst/>
+          </a:prstGeom>
+          <a:noFill/>
+        </p:spPr>
+        <p:txBody>
+          <a:bodyPr vertOverflow="overflow" horzOverflow="overflow" vert="horz" wrap="square" lIns="45720" tIns="45720" rIns="45720" bIns="45720" numCol="1" spcCol="0" rtlCol="0" fromWordArt="0" anchor="ctr" anchorCtr="0" forceAA="0" upright="0" compatLnSpc="0">
+            <a:noAutofit/>
+          </a:bodyPr>
+          <a:p>
+            <a:pPr algn="l">
+              <a:defRPr/>
+            </a:pPr>
+            <a:r>
+              <a:rPr lang="it-IT" sz="1600" b="1">
+                <a:solidFill>
+                  <a:schemeClr val="tx2"/>
+                </a:solidFill>
+              </a:rPr>
+              <a:t>{share_earnings}</a:t>
+            </a:r>
+            <a:endParaRPr sz="1600" b="1">
+              <a:solidFill>
+                <a:schemeClr val="tx2"/>
+              </a:solidFill>
+            </a:endParaRPr>
+          </a:p>
+        </p:txBody>
+      </p:sp>
+      <p:sp>
+        <p:nvSpPr>
+          <p:cNvPr id="1940343906" name="share_price"/>
+          <p:cNvSpPr txBox="1"/>
+          <p:nvPr/>
+        </p:nvSpPr>
+        <p:spPr bwMode="auto">
+          <a:xfrm rot="0" flipH="0" flipV="0">
+            <a:off x="2235198" y="4241799"/>
+            <a:ext cx="2438400" cy="406396"/>
+          </a:xfrm>
+          <a:prstGeom prst="rect">
+            <a:avLst/>
+          </a:prstGeom>
+          <a:noFill/>
+        </p:spPr>
+        <p:txBody>
+          <a:bodyPr vertOverflow="overflow" horzOverflow="overflow" vert="horz" wrap="square" lIns="45720" tIns="45720" rIns="45720" bIns="45720" numCol="1" spcCol="0" rtlCol="0" fromWordArt="0" anchor="ctr" anchorCtr="0" forceAA="0" upright="0" compatLnSpc="0">
+            <a:noAutofit/>
+          </a:bodyPr>
+          <a:p>
+            <a:pPr algn="l">
+              <a:defRPr/>
+            </a:pPr>
+            <a:r>
+              <a:rPr lang="it-IT" sz="1600" b="1">
+                <a:solidFill>
+                  <a:schemeClr val="tx2"/>
+                </a:solidFill>
+              </a:rPr>
+              <a:t>{share_price}</a:t>
+            </a:r>
+            <a:endParaRPr sz="1600" b="1">
+              <a:solidFill>
+                <a:schemeClr val="tx2"/>
+              </a:solidFill>
+            </a:endParaRPr>
+          </a:p>
+        </p:txBody>
+      </p:sp>
+      <p:sp>
+        <p:nvSpPr>
+          <p:cNvPr id="410037861" name="analyst_rating"/>
+          <p:cNvSpPr txBox="1"/>
+          <p:nvPr/>
+        </p:nvSpPr>
+        <p:spPr bwMode="auto">
+          <a:xfrm rot="0" flipH="0" flipV="0">
+            <a:off x="2235198" y="5054598"/>
+            <a:ext cx="2438400" cy="406396"/>
+          </a:xfrm>
+          <a:prstGeom prst="rect">
+            <a:avLst/>
+          </a:prstGeom>
+          <a:noFill/>
+        </p:spPr>
+        <p:txBody>
+          <a:bodyPr vertOverflow="overflow" horzOverflow="overflow" vert="horz" wrap="square" lIns="45720" tIns="45720" rIns="45720" bIns="45720" numCol="1" spcCol="0" rtlCol="0" fromWordArt="0" anchor="ctr" anchorCtr="0" forceAA="0" upright="0" compatLnSpc="0">
+            <a:noAutofit/>
+          </a:bodyPr>
+          <a:p>
+            <a:pPr algn="l">
+              <a:defRPr/>
+            </a:pPr>
+            <a:r>
+              <a:rPr lang="it-IT" sz="1600" b="1">
+                <a:solidFill>
+                  <a:schemeClr val="tx2"/>
+                </a:solidFill>
+              </a:rPr>
+              <a:t>{analyst_rating}</a:t>
+            </a:r>
+            <a:endParaRPr sz="1600" b="1">
+              <a:solidFill>
+                <a:schemeClr val="tx2"/>
+              </a:solidFill>
+            </a:endParaRPr>
+          </a:p>
+        </p:txBody>
+      </p:sp>
+      <p:sp>
+        <p:nvSpPr>
+          <p:cNvPr id="146561029" name="industry"/>
+          <p:cNvSpPr txBox="1"/>
+          <p:nvPr/>
+        </p:nvSpPr>
+        <p:spPr bwMode="auto">
+          <a:xfrm rot="0" flipH="0" flipV="0">
+            <a:off x="2235198" y="3429000"/>
+            <a:ext cx="2438400" cy="406396"/>
+          </a:xfrm>
+          <a:prstGeom prst="rect">
+            <a:avLst/>
+          </a:prstGeom>
+          <a:noFill/>
+        </p:spPr>
+        <p:txBody>
+          <a:bodyPr vertOverflow="overflow" horzOverflow="overflow" vert="horz" wrap="square" lIns="45720" tIns="45720" rIns="45720" bIns="45720" numCol="1" spcCol="0" rtlCol="0" fromWordArt="0" anchor="ctr" anchorCtr="0" forceAA="0" upright="0" compatLnSpc="0">
+            <a:noAutofit/>
+          </a:bodyPr>
+          <a:p>
+            <a:pPr algn="l">
+              <a:defRPr/>
+            </a:pPr>
+            <a:r>
+              <a:rPr lang="it-IT" sz="1600" b="0">
+                <a:solidFill>
+                  <a:schemeClr val="tx2"/>
+                </a:solidFill>
+              </a:rPr>
+              <a:t>{industry}</a:t>
+            </a:r>
+            <a:endParaRPr sz="1600" b="0">
+              <a:solidFill>
+                <a:schemeClr val="tx2"/>
+              </a:solidFill>
+            </a:endParaRPr>
+          </a:p>
+        </p:txBody>
+      </p:sp>
+      <p:sp>
+        <p:nvSpPr>
+          <p:cNvPr id="1760029809" name="name"/>
+          <p:cNvSpPr txBox="1"/>
+          <p:nvPr/>
+        </p:nvSpPr>
+        <p:spPr bwMode="auto">
+          <a:xfrm rot="0" flipH="0" flipV="0">
+            <a:off x="2235198" y="2209798"/>
+            <a:ext cx="2438400" cy="406396"/>
+          </a:xfrm>
+          <a:prstGeom prst="rect">
+            <a:avLst/>
+          </a:prstGeom>
+          <a:noFill/>
+        </p:spPr>
+        <p:txBody>
+          <a:bodyPr vertOverflow="overflow" horzOverflow="overflow" vert="horz" wrap="square" lIns="45720" tIns="45720" rIns="45720" bIns="45720" numCol="1" spcCol="0" rtlCol="0" fromWordArt="0" anchor="ctr" anchorCtr="0" forceAA="0" upright="0" compatLnSpc="0">
+            <a:noAutofit/>
+          </a:bodyPr>
+          <a:p>
+            <a:pPr algn="l">
+              <a:defRPr/>
+            </a:pPr>
+            <a:r>
+              <a:rPr lang="it-IT" sz="1600" b="1">
+                <a:solidFill>
+                  <a:schemeClr val="tx2"/>
+                </a:solidFill>
+              </a:rPr>
+              <a:t>{name}</a:t>
+            </a:r>
+            <a:endParaRPr sz="1600" b="1">
+              <a:solidFill>
+                <a:schemeClr val="tx2"/>
+              </a:solidFill>
+            </a:endParaRPr>
+          </a:p>
+        </p:txBody>
+      </p:sp>
+      <p:sp>
+        <p:nvSpPr>
+          <p:cNvPr id="708493840" name="beta"/>
+          <p:cNvSpPr txBox="1"/>
+          <p:nvPr/>
+        </p:nvSpPr>
+        <p:spPr bwMode="auto">
+          <a:xfrm rot="0" flipH="0" flipV="0">
+            <a:off x="2235198" y="5460998"/>
+            <a:ext cx="2438400" cy="406396"/>
+          </a:xfrm>
+          <a:prstGeom prst="rect">
+            <a:avLst/>
+          </a:prstGeom>
+          <a:noFill/>
+        </p:spPr>
+        <p:txBody>
+          <a:bodyPr vertOverflow="overflow" horzOverflow="overflow" vert="horz" wrap="square" lIns="45720" tIns="45720" rIns="45720" bIns="45720" numCol="1" spcCol="0" rtlCol="0" fromWordArt="0" anchor="ctr" anchorCtr="0" forceAA="0" upright="0" compatLnSpc="0">
+            <a:noAutofit/>
+          </a:bodyPr>
+          <a:p>
+            <a:pPr algn="l">
+              <a:defRPr/>
+            </a:pPr>
+            <a:r>
+              <a:rPr lang="it-IT" sz="1600" b="1">
+                <a:solidFill>
+                  <a:schemeClr val="tx2"/>
+                </a:solidFill>
+              </a:rPr>
+              <a:t>{share_beta}</a:t>
+            </a:r>
+            <a:endParaRPr sz="1600" b="1">
+              <a:solidFill>
+                <a:schemeClr val="tx2"/>
+              </a:solidFill>
+            </a:endParaRPr>
+          </a:p>
+        </p:txBody>
+      </p:sp>
+      <p:sp>
+        <p:nvSpPr>
+          <p:cNvPr id="203914284" name="Title 1"/>
           <p:cNvSpPr>
             <a:spLocks noGrp="1"/>
           </p:cNvSpPr>
@@ -3021,7 +3381,7 @@
       </p:sp>
       <p:sp>
         <p:nvSpPr>
-          <p:cNvPr id="131066751" name="Footer Placeholder 4"/>
+          <p:cNvPr id="1748728472" name="Footer Placeholder 4"/>
           <p:cNvSpPr>
             <a:spLocks noGrp="1"/>
           </p:cNvSpPr>
@@ -3065,7 +3425,7 @@
       </p:sp>
       <p:sp>
         <p:nvSpPr>
-          <p:cNvPr id="531998493" name="Slide Number Placeholder 5"/>
+          <p:cNvPr id="1074688121" name="Slide Number Placeholder 5"/>
           <p:cNvSpPr>
             <a:spLocks noGrp="1"/>
           </p:cNvSpPr>
@@ -3095,7 +3455,7 @@
       </p:sp>
       <p:cxnSp>
         <p:nvCxnSpPr>
-          <p:cNvPr id="283897616" name=""/>
+          <p:cNvPr id="1615027021" name=""/>
           <p:cNvCxnSpPr/>
           <p:nvPr/>
         </p:nvCxnSpPr>
@@ -3134,14 +3494,14 @@
       </p:cxnSp>
       <p:cxnSp>
         <p:nvCxnSpPr>
-          <p:cNvPr id="765619248" name=""/>
+          <p:cNvPr id="1285912436" name=""/>
           <p:cNvCxnSpPr/>
           <p:nvPr/>
         </p:nvCxnSpPr>
         <p:spPr bwMode="auto">
           <a:xfrm flipH="0" flipV="0">
-            <a:off x="406399" y="1803075"/>
-            <a:ext cx="4063999" cy="320"/>
+            <a:off x="406398" y="1803074"/>
+            <a:ext cx="4267200" cy="319"/>
           </a:xfrm>
           <a:prstGeom prst="line">
             <a:avLst/>
@@ -3173,7 +3533,7 @@
       </p:cxnSp>
       <p:sp>
         <p:nvSpPr>
-          <p:cNvPr id="1946266591" name=""/>
+          <p:cNvPr id="865303851" name=""/>
           <p:cNvSpPr txBox="1"/>
           <p:nvPr/>
         </p:nvSpPr>
@@ -3213,14 +3573,14 @@
       </p:sp>
       <p:sp>
         <p:nvSpPr>
-          <p:cNvPr id="1710063367" name=""/>
+          <p:cNvPr id="219660096" name=""/>
           <p:cNvSpPr txBox="1"/>
           <p:nvPr/>
         </p:nvSpPr>
         <p:spPr bwMode="auto">
           <a:xfrm rot="0" flipH="0" flipV="0">
-            <a:off x="406399" y="1396998"/>
-            <a:ext cx="4063999" cy="406398"/>
+            <a:off x="406398" y="1396998"/>
+            <a:ext cx="4267200" cy="406397"/>
           </a:xfrm>
           <a:prstGeom prst="rect">
             <a:avLst/>
@@ -3253,13 +3613,13 @@
       </p:sp>
       <p:sp>
         <p:nvSpPr>
-          <p:cNvPr id="1471135242" name="description"/>
+          <p:cNvPr id="457322139" name="description"/>
           <p:cNvSpPr txBox="1"/>
           <p:nvPr/>
         </p:nvSpPr>
         <p:spPr bwMode="auto">
           <a:xfrm rot="0" flipH="0" flipV="0">
-            <a:off x="4876798" y="2006598"/>
+            <a:off x="4876799" y="2006599"/>
             <a:ext cx="6908798" cy="1828800"/>
           </a:xfrm>
           <a:prstGeom prst="rect">
@@ -3296,7 +3656,7 @@
       </p:sp>
       <p:cxnSp>
         <p:nvCxnSpPr>
-          <p:cNvPr id="1335828247" name=""/>
+          <p:cNvPr id="1153571361" name=""/>
           <p:cNvCxnSpPr/>
           <p:nvPr/>
         </p:nvCxnSpPr>
@@ -3335,13 +3695,13 @@
       </p:cxnSp>
       <p:sp>
         <p:nvSpPr>
-          <p:cNvPr id="359252366" name="ltm_revenue"/>
+          <p:cNvPr id="1888992561" name="ltm_revenue"/>
           <p:cNvSpPr txBox="1"/>
           <p:nvPr/>
         </p:nvSpPr>
         <p:spPr bwMode="auto">
           <a:xfrm rot="0" flipH="0" flipV="0">
-            <a:off x="4876798" y="4648197"/>
+            <a:off x="4876799" y="4648199"/>
             <a:ext cx="1422399" cy="609599"/>
           </a:xfrm>
           <a:prstGeom prst="rect">
@@ -3375,7 +3735,7 @@
       </p:sp>
       <p:sp>
         <p:nvSpPr>
-          <p:cNvPr id="1113813532" name=""/>
+          <p:cNvPr id="1156163447" name=""/>
           <p:cNvSpPr/>
           <p:nvPr/>
         </p:nvSpPr>
@@ -3428,14 +3788,14 @@
       </p:sp>
       <p:cxnSp>
         <p:nvCxnSpPr>
-          <p:cNvPr id="705532522" name=""/>
+          <p:cNvPr id="1928546825" name=""/>
           <p:cNvCxnSpPr/>
           <p:nvPr/>
         </p:nvCxnSpPr>
         <p:spPr bwMode="auto">
           <a:xfrm flipH="0" flipV="0">
-            <a:off x="2235198" y="3429000"/>
-            <a:ext cx="2031998" cy="292"/>
+            <a:off x="2235197" y="3429000"/>
+            <a:ext cx="2201333" cy="291"/>
           </a:xfrm>
           <a:prstGeom prst="line">
             <a:avLst/>
@@ -3467,14 +3827,14 @@
       </p:cxnSp>
       <p:cxnSp>
         <p:nvCxnSpPr>
-          <p:cNvPr id="1051659448" name=""/>
+          <p:cNvPr id="1466633423" name=""/>
           <p:cNvCxnSpPr/>
           <p:nvPr/>
         </p:nvCxnSpPr>
         <p:spPr bwMode="auto">
           <a:xfrm flipH="0" flipV="0">
-            <a:off x="2235198" y="3835398"/>
-            <a:ext cx="2031998" cy="292"/>
+            <a:off x="2235197" y="3835397"/>
+            <a:ext cx="2201333" cy="291"/>
           </a:xfrm>
           <a:prstGeom prst="line">
             <a:avLst/>
@@ -3506,14 +3866,14 @@
       </p:cxnSp>
       <p:cxnSp>
         <p:nvCxnSpPr>
-          <p:cNvPr id="580349456" name=""/>
+          <p:cNvPr id="389821560" name=""/>
           <p:cNvCxnSpPr/>
           <p:nvPr/>
         </p:nvCxnSpPr>
         <p:spPr bwMode="auto">
           <a:xfrm flipH="0" flipV="0">
-            <a:off x="2235198" y="4241799"/>
-            <a:ext cx="2031998" cy="292"/>
+            <a:off x="2235197" y="4241799"/>
+            <a:ext cx="2201333" cy="291"/>
           </a:xfrm>
           <a:prstGeom prst="line">
             <a:avLst/>
@@ -3545,14 +3905,14 @@
       </p:cxnSp>
       <p:cxnSp>
         <p:nvCxnSpPr>
-          <p:cNvPr id="440031810" name=""/>
+          <p:cNvPr id="564597063" name=""/>
           <p:cNvCxnSpPr/>
           <p:nvPr/>
         </p:nvCxnSpPr>
         <p:spPr bwMode="auto">
           <a:xfrm flipH="0" flipV="0">
-            <a:off x="2235198" y="4648199"/>
-            <a:ext cx="2031998" cy="292"/>
+            <a:off x="2235197" y="4648197"/>
+            <a:ext cx="2201333" cy="291"/>
           </a:xfrm>
           <a:prstGeom prst="line">
             <a:avLst/>
@@ -3584,333 +3944,14 @@
       </p:cxnSp>
       <p:cxnSp>
         <p:nvCxnSpPr>
-          <p:cNvPr id="789792321" name=""/>
+          <p:cNvPr id="1927283516" name=""/>
           <p:cNvCxnSpPr/>
           <p:nvPr/>
         </p:nvCxnSpPr>
         <p:spPr bwMode="auto">
           <a:xfrm flipH="0" flipV="0">
-            <a:off x="2235198" y="5054600"/>
-            <a:ext cx="2031998" cy="292"/>
-          </a:xfrm>
-          <a:prstGeom prst="line">
-            <a:avLst/>
-          </a:prstGeom>
-          <a:ln w="6350" cap="flat" cmpd="sng" algn="ctr">
-            <a:solidFill>
-              <a:schemeClr val="tx2"/>
-            </a:solidFill>
-            <a:prstDash val="solid"/>
-            <a:miter lim="800000"/>
-          </a:ln>
-        </p:spPr>
-        <p:style>
-          <a:lnRef idx="1">
-            <a:schemeClr val="accent1">
-              <a:shade val="50000"/>
-            </a:schemeClr>
-          </a:lnRef>
-          <a:fillRef idx="0">
-            <a:schemeClr val="accent1"/>
-          </a:fillRef>
-          <a:effectRef idx="0">
-            <a:schemeClr val="accent1"/>
-          </a:effectRef>
-          <a:fontRef idx="minor">
-            <a:schemeClr val="tx1"/>
-          </a:fontRef>
-        </p:style>
-      </p:cxnSp>
-      <p:sp>
-        <p:nvSpPr>
-          <p:cNvPr id="502085939" name="symbol"/>
-          <p:cNvSpPr txBox="1"/>
-          <p:nvPr/>
-        </p:nvSpPr>
-        <p:spPr bwMode="auto">
-          <a:xfrm rot="0" flipH="0" flipV="0">
-            <a:off x="2235199" y="2616199"/>
-            <a:ext cx="2031999" cy="406398"/>
-          </a:xfrm>
-          <a:prstGeom prst="rect">
-            <a:avLst/>
-          </a:prstGeom>
-          <a:noFill/>
-        </p:spPr>
-        <p:txBody>
-          <a:bodyPr vertOverflow="overflow" horzOverflow="overflow" vert="horz" wrap="square" lIns="91440" tIns="45720" rIns="91440" bIns="45720" numCol="1" spcCol="0" rtlCol="0" fromWordArt="0" anchor="ctr" anchorCtr="0" forceAA="0" upright="0" compatLnSpc="0">
-            <a:noAutofit/>
-          </a:bodyPr>
-          <a:p>
-            <a:pPr algn="ctr">
-              <a:defRPr/>
-            </a:pPr>
-            <a:r>
-              <a:rPr lang="it-IT" sz="1400" b="0">
-                <a:solidFill>
-                  <a:schemeClr val="tx2"/>
-                </a:solidFill>
-              </a:rPr>
-              <a:t>{ticker}</a:t>
-            </a:r>
-            <a:endParaRPr sz="1400" b="0">
-              <a:solidFill>
-                <a:schemeClr val="tx2"/>
-              </a:solidFill>
-            </a:endParaRPr>
-          </a:p>
-        </p:txBody>
-      </p:sp>
-      <p:sp>
-        <p:nvSpPr>
-          <p:cNvPr id="1667561542" name="sector"/>
-          <p:cNvSpPr txBox="1"/>
-          <p:nvPr/>
-        </p:nvSpPr>
-        <p:spPr bwMode="auto">
-          <a:xfrm rot="0" flipH="0" flipV="0">
-            <a:off x="2235199" y="3022599"/>
-            <a:ext cx="2031999" cy="406398"/>
-          </a:xfrm>
-          <a:prstGeom prst="rect">
-            <a:avLst/>
-          </a:prstGeom>
-          <a:noFill/>
-        </p:spPr>
-        <p:txBody>
-          <a:bodyPr vertOverflow="overflow" horzOverflow="overflow" vert="horz" wrap="square" lIns="91440" tIns="45720" rIns="91440" bIns="45720" numCol="1" spcCol="0" rtlCol="0" fromWordArt="0" anchor="ctr" anchorCtr="0" forceAA="0" upright="0" compatLnSpc="0">
-            <a:noAutofit/>
-          </a:bodyPr>
-          <a:p>
-            <a:pPr algn="ctr">
-              <a:defRPr/>
-            </a:pPr>
-            <a:r>
-              <a:rPr lang="it-IT" sz="1400" b="0">
-                <a:solidFill>
-                  <a:schemeClr val="tx2"/>
-                </a:solidFill>
-              </a:rPr>
-              <a:t>{sector}</a:t>
-            </a:r>
-            <a:endParaRPr sz="1400" b="0">
-              <a:solidFill>
-                <a:schemeClr val="tx2"/>
-              </a:solidFill>
-            </a:endParaRPr>
-          </a:p>
-        </p:txBody>
-      </p:sp>
-      <p:sp>
-        <p:nvSpPr>
-          <p:cNvPr id="670506788" name="market_cap"/>
-          <p:cNvSpPr txBox="1"/>
-          <p:nvPr/>
-        </p:nvSpPr>
-        <p:spPr bwMode="auto">
-          <a:xfrm rot="0" flipH="0" flipV="0">
-            <a:off x="2235199" y="3835399"/>
-            <a:ext cx="2031999" cy="406398"/>
-          </a:xfrm>
-          <a:prstGeom prst="rect">
-            <a:avLst/>
-          </a:prstGeom>
-          <a:noFill/>
-        </p:spPr>
-        <p:txBody>
-          <a:bodyPr vertOverflow="overflow" horzOverflow="overflow" vert="horz" wrap="square" lIns="91440" tIns="45720" rIns="91440" bIns="45720" numCol="1" spcCol="0" rtlCol="0" fromWordArt="0" anchor="ctr" anchorCtr="0" forceAA="0" upright="0" compatLnSpc="0">
-            <a:noAutofit/>
-          </a:bodyPr>
-          <a:p>
-            <a:pPr algn="ctr">
-              <a:defRPr/>
-            </a:pPr>
-            <a:r>
-              <a:rPr lang="it-IT" sz="1400" b="0">
-                <a:solidFill>
-                  <a:schemeClr val="tx2"/>
-                </a:solidFill>
-              </a:rPr>
-              <a:t>{market_cap}</a:t>
-            </a:r>
-            <a:endParaRPr sz="1400" b="0">
-              <a:solidFill>
-                <a:schemeClr val="tx2"/>
-              </a:solidFill>
-            </a:endParaRPr>
-          </a:p>
-        </p:txBody>
-      </p:sp>
-      <p:sp>
-        <p:nvSpPr>
-          <p:cNvPr id="984109601" name="earnings"/>
-          <p:cNvSpPr txBox="1"/>
-          <p:nvPr/>
-        </p:nvSpPr>
-        <p:spPr bwMode="auto">
-          <a:xfrm rot="0" flipH="0" flipV="0">
-            <a:off x="2235198" y="4648199"/>
-            <a:ext cx="2031999" cy="406398"/>
-          </a:xfrm>
-          <a:prstGeom prst="rect">
-            <a:avLst/>
-          </a:prstGeom>
-          <a:noFill/>
-        </p:spPr>
-        <p:txBody>
-          <a:bodyPr vertOverflow="overflow" horzOverflow="overflow" vert="horz" wrap="square" lIns="91440" tIns="45720" rIns="91440" bIns="45720" numCol="1" spcCol="0" rtlCol="0" fromWordArt="0" anchor="ctr" anchorCtr="0" forceAA="0" upright="0" compatLnSpc="0">
-            <a:noAutofit/>
-          </a:bodyPr>
-          <a:p>
-            <a:pPr algn="ctr">
-              <a:defRPr/>
-            </a:pPr>
-            <a:r>
-              <a:rPr lang="it-IT" sz="1400" b="0">
-                <a:solidFill>
-                  <a:schemeClr val="tx2"/>
-                </a:solidFill>
-              </a:rPr>
-              <a:t>{share_earnings}</a:t>
-            </a:r>
-            <a:endParaRPr sz="1400" b="0">
-              <a:solidFill>
-                <a:schemeClr val="tx2"/>
-              </a:solidFill>
-            </a:endParaRPr>
-          </a:p>
-        </p:txBody>
-      </p:sp>
-      <p:sp>
-        <p:nvSpPr>
-          <p:cNvPr id="381422790" name="stock_price"/>
-          <p:cNvSpPr txBox="1"/>
-          <p:nvPr/>
-        </p:nvSpPr>
-        <p:spPr bwMode="auto">
-          <a:xfrm rot="0" flipH="0" flipV="0">
-            <a:off x="2235198" y="4241799"/>
-            <a:ext cx="2031999" cy="406398"/>
-          </a:xfrm>
-          <a:prstGeom prst="rect">
-            <a:avLst/>
-          </a:prstGeom>
-          <a:noFill/>
-        </p:spPr>
-        <p:txBody>
-          <a:bodyPr vertOverflow="overflow" horzOverflow="overflow" vert="horz" wrap="square" lIns="91440" tIns="45720" rIns="91440" bIns="45720" numCol="1" spcCol="0" rtlCol="0" fromWordArt="0" anchor="ctr" anchorCtr="0" forceAA="0" upright="0" compatLnSpc="0">
-            <a:noAutofit/>
-          </a:bodyPr>
-          <a:p>
-            <a:pPr algn="ctr">
-              <a:defRPr/>
-            </a:pPr>
-            <a:r>
-              <a:rPr lang="it-IT" sz="1400" b="0">
-                <a:solidFill>
-                  <a:schemeClr val="tx2"/>
-                </a:solidFill>
-              </a:rPr>
-              <a:t>{share_price}</a:t>
-            </a:r>
-            <a:endParaRPr sz="1400" b="0">
-              <a:solidFill>
-                <a:schemeClr val="tx2"/>
-              </a:solidFill>
-            </a:endParaRPr>
-          </a:p>
-        </p:txBody>
-      </p:sp>
-      <p:sp>
-        <p:nvSpPr>
-          <p:cNvPr id="443073087" name="analyst_rating"/>
-          <p:cNvSpPr txBox="1"/>
-          <p:nvPr/>
-        </p:nvSpPr>
-        <p:spPr bwMode="auto">
-          <a:xfrm rot="0" flipH="0" flipV="0">
-            <a:off x="2235199" y="5054599"/>
-            <a:ext cx="2031999" cy="406398"/>
-          </a:xfrm>
-          <a:prstGeom prst="rect">
-            <a:avLst/>
-          </a:prstGeom>
-          <a:noFill/>
-        </p:spPr>
-        <p:txBody>
-          <a:bodyPr vertOverflow="overflow" horzOverflow="overflow" vert="horz" wrap="square" lIns="91440" tIns="45720" rIns="91440" bIns="45720" numCol="1" spcCol="0" rtlCol="0" fromWordArt="0" anchor="ctr" anchorCtr="0" forceAA="0" upright="0" compatLnSpc="0">
-            <a:noAutofit/>
-          </a:bodyPr>
-          <a:p>
-            <a:pPr algn="ctr">
-              <a:defRPr/>
-            </a:pPr>
-            <a:r>
-              <a:rPr lang="it-IT" sz="1400" b="0">
-                <a:solidFill>
-                  <a:schemeClr val="tx2"/>
-                </a:solidFill>
-              </a:rPr>
-              <a:t>{analyst_rating}</a:t>
-            </a:r>
-            <a:endParaRPr sz="1400" b="0">
-              <a:solidFill>
-                <a:schemeClr val="tx2"/>
-              </a:solidFill>
-            </a:endParaRPr>
-          </a:p>
-        </p:txBody>
-      </p:sp>
-      <p:sp>
-        <p:nvSpPr>
-          <p:cNvPr id="1304673865" name="industry"/>
-          <p:cNvSpPr txBox="1"/>
-          <p:nvPr/>
-        </p:nvSpPr>
-        <p:spPr bwMode="auto">
-          <a:xfrm rot="0" flipH="0" flipV="0">
-            <a:off x="2235199" y="3429000"/>
-            <a:ext cx="2031999" cy="406398"/>
-          </a:xfrm>
-          <a:prstGeom prst="rect">
-            <a:avLst/>
-          </a:prstGeom>
-          <a:noFill/>
-        </p:spPr>
-        <p:txBody>
-          <a:bodyPr vertOverflow="overflow" horzOverflow="overflow" vert="horz" wrap="square" lIns="91440" tIns="45720" rIns="91440" bIns="45720" numCol="1" spcCol="0" rtlCol="0" fromWordArt="0" anchor="ctr" anchorCtr="0" forceAA="0" upright="0" compatLnSpc="0">
-            <a:noAutofit/>
-          </a:bodyPr>
-          <a:p>
-            <a:pPr algn="ctr">
-              <a:defRPr/>
-            </a:pPr>
-            <a:r>
-              <a:rPr lang="it-IT" sz="1400" b="0">
-                <a:solidFill>
-                  <a:schemeClr val="tx2"/>
-                </a:solidFill>
-              </a:rPr>
-              <a:t>{industry}</a:t>
-            </a:r>
-            <a:endParaRPr sz="1400" b="0">
-              <a:solidFill>
-                <a:schemeClr val="tx2"/>
-              </a:solidFill>
-            </a:endParaRPr>
-          </a:p>
-        </p:txBody>
-      </p:sp>
-      <p:cxnSp>
-        <p:nvCxnSpPr>
-          <p:cNvPr id="1166320438" name=""/>
-          <p:cNvCxnSpPr/>
-          <p:nvPr/>
-        </p:nvCxnSpPr>
-        <p:spPr bwMode="auto">
-          <a:xfrm flipH="0" flipV="0">
-            <a:off x="2235198" y="3022599"/>
-            <a:ext cx="2031998" cy="360"/>
+            <a:off x="2235197" y="5054599"/>
+            <a:ext cx="2201333" cy="291"/>
           </a:xfrm>
           <a:prstGeom prst="line">
             <a:avLst/>
@@ -3942,14 +3983,14 @@
       </p:cxnSp>
       <p:cxnSp>
         <p:nvCxnSpPr>
-          <p:cNvPr id="1328654871" name=""/>
+          <p:cNvPr id="1900259562" name=""/>
           <p:cNvCxnSpPr/>
           <p:nvPr/>
         </p:nvCxnSpPr>
         <p:spPr bwMode="auto">
           <a:xfrm flipH="0" flipV="0">
-            <a:off x="2235198" y="2616199"/>
-            <a:ext cx="2031998" cy="360"/>
+            <a:off x="2235197" y="3022598"/>
+            <a:ext cx="2201333" cy="360"/>
           </a:xfrm>
           <a:prstGeom prst="line">
             <a:avLst/>
@@ -3957,404 +3998,6 @@
           <a:ln w="6350" cap="flat" cmpd="sng" algn="ctr">
             <a:solidFill>
               <a:schemeClr val="tx2"/>
-            </a:solidFill>
-            <a:prstDash val="solid"/>
-            <a:miter lim="800000"/>
-          </a:ln>
-        </p:spPr>
-        <p:style>
-          <a:lnRef idx="1">
-            <a:schemeClr val="accent1">
-              <a:shade val="50000"/>
-            </a:schemeClr>
-          </a:lnRef>
-          <a:fillRef idx="0">
-            <a:schemeClr val="accent1"/>
-          </a:fillRef>
-          <a:effectRef idx="0">
-            <a:schemeClr val="accent1"/>
-          </a:effectRef>
-          <a:fontRef idx="minor">
-            <a:schemeClr val="tx1"/>
-          </a:fontRef>
-        </p:style>
-      </p:cxnSp>
-      <p:sp>
-        <p:nvSpPr>
-          <p:cNvPr id="779186506" name="name"/>
-          <p:cNvSpPr txBox="1"/>
-          <p:nvPr/>
-        </p:nvSpPr>
-        <p:spPr bwMode="auto">
-          <a:xfrm rot="0" flipH="0" flipV="0">
-            <a:off x="2235199" y="2209799"/>
-            <a:ext cx="2031999" cy="406398"/>
-          </a:xfrm>
-          <a:prstGeom prst="rect">
-            <a:avLst/>
-          </a:prstGeom>
-          <a:noFill/>
-        </p:spPr>
-        <p:txBody>
-          <a:bodyPr vertOverflow="overflow" horzOverflow="overflow" vert="horz" wrap="square" lIns="91440" tIns="45720" rIns="91440" bIns="45720" numCol="1" spcCol="0" rtlCol="0" fromWordArt="0" anchor="ctr" anchorCtr="0" forceAA="0" upright="0" compatLnSpc="0">
-            <a:noAutofit/>
-          </a:bodyPr>
-          <a:p>
-            <a:pPr algn="ctr">
-              <a:defRPr/>
-            </a:pPr>
-            <a:r>
-              <a:rPr lang="it-IT" sz="1400" b="0">
-                <a:solidFill>
-                  <a:schemeClr val="tx2"/>
-                </a:solidFill>
-              </a:rPr>
-              <a:t>{name}</a:t>
-            </a:r>
-            <a:endParaRPr sz="1400" b="1">
-              <a:solidFill>
-                <a:schemeClr val="tx2"/>
-              </a:solidFill>
-            </a:endParaRPr>
-          </a:p>
-        </p:txBody>
-      </p:sp>
-      <p:cxnSp>
-        <p:nvCxnSpPr>
-          <p:cNvPr id="642315237" name=""/>
-          <p:cNvCxnSpPr/>
-          <p:nvPr/>
-        </p:nvCxnSpPr>
-        <p:spPr bwMode="auto">
-          <a:xfrm rot="0" flipH="0" flipV="0">
-            <a:off x="609598" y="3022958"/>
-            <a:ext cx="1161141" cy="0"/>
-          </a:xfrm>
-          <a:prstGeom prst="line">
-            <a:avLst/>
-          </a:prstGeom>
-          <a:ln w="6350" cap="flat" cmpd="sng" algn="ctr">
-            <a:solidFill>
-              <a:schemeClr val="bg2"/>
-            </a:solidFill>
-            <a:prstDash val="solid"/>
-            <a:miter lim="800000"/>
-          </a:ln>
-        </p:spPr>
-        <p:style>
-          <a:lnRef idx="1">
-            <a:schemeClr val="accent1">
-              <a:shade val="50000"/>
-            </a:schemeClr>
-          </a:lnRef>
-          <a:fillRef idx="0">
-            <a:schemeClr val="accent1"/>
-          </a:fillRef>
-          <a:effectRef idx="0">
-            <a:schemeClr val="accent1"/>
-          </a:effectRef>
-          <a:fontRef idx="minor">
-            <a:schemeClr val="tx1"/>
-          </a:fontRef>
-        </p:style>
-      </p:cxnSp>
-      <p:sp>
-        <p:nvSpPr>
-          <p:cNvPr id="803893722" name=""/>
-          <p:cNvSpPr txBox="1"/>
-          <p:nvPr/>
-        </p:nvSpPr>
-        <p:spPr bwMode="auto">
-          <a:xfrm rot="0" flipH="0" flipV="0">
-            <a:off x="406399" y="2616198"/>
-            <a:ext cx="1625598" cy="406398"/>
-          </a:xfrm>
-          <a:prstGeom prst="rect">
-            <a:avLst/>
-          </a:prstGeom>
-          <a:noFill/>
-        </p:spPr>
-        <p:txBody>
-          <a:bodyPr vertOverflow="overflow" horzOverflow="overflow" vert="horz" wrap="square" lIns="91440" tIns="45720" rIns="91440" bIns="45720" numCol="1" spcCol="0" rtlCol="0" fromWordArt="0" anchor="ctr" anchorCtr="0" forceAA="0" upright="0" compatLnSpc="0">
-            <a:noAutofit/>
-          </a:bodyPr>
-          <a:p>
-            <a:pPr algn="ctr">
-              <a:defRPr/>
-            </a:pPr>
-            <a:r>
-              <a:rPr lang="it-IT" sz="1400" b="1">
-                <a:solidFill>
-                  <a:schemeClr val="bg2"/>
-                </a:solidFill>
-              </a:rPr>
-              <a:t>Symbol</a:t>
-            </a:r>
-            <a:endParaRPr sz="1400" b="1">
-              <a:solidFill>
-                <a:schemeClr val="bg2"/>
-              </a:solidFill>
-            </a:endParaRPr>
-          </a:p>
-        </p:txBody>
-      </p:sp>
-      <p:sp>
-        <p:nvSpPr>
-          <p:cNvPr id="1781834270" name=""/>
-          <p:cNvSpPr txBox="1"/>
-          <p:nvPr/>
-        </p:nvSpPr>
-        <p:spPr bwMode="auto">
-          <a:xfrm rot="0" flipH="0" flipV="0">
-            <a:off x="406399" y="3022598"/>
-            <a:ext cx="1625598" cy="406398"/>
-          </a:xfrm>
-          <a:prstGeom prst="rect">
-            <a:avLst/>
-          </a:prstGeom>
-          <a:noFill/>
-        </p:spPr>
-        <p:txBody>
-          <a:bodyPr vertOverflow="overflow" horzOverflow="overflow" vert="horz" wrap="square" lIns="91440" tIns="45720" rIns="91440" bIns="45720" numCol="1" spcCol="0" rtlCol="0" fromWordArt="0" anchor="ctr" anchorCtr="0" forceAA="0" upright="0" compatLnSpc="0">
-            <a:noAutofit/>
-          </a:bodyPr>
-          <a:p>
-            <a:pPr algn="ctr">
-              <a:defRPr/>
-            </a:pPr>
-            <a:r>
-              <a:rPr lang="it-IT" sz="1400" b="1">
-                <a:solidFill>
-                  <a:schemeClr val="bg2"/>
-                </a:solidFill>
-              </a:rPr>
-              <a:t>Sector</a:t>
-            </a:r>
-            <a:endParaRPr sz="1400" b="1">
-              <a:solidFill>
-                <a:schemeClr val="bg2"/>
-              </a:solidFill>
-            </a:endParaRPr>
-          </a:p>
-        </p:txBody>
-      </p:sp>
-      <p:sp>
-        <p:nvSpPr>
-          <p:cNvPr id="199038597" name=""/>
-          <p:cNvSpPr txBox="1"/>
-          <p:nvPr/>
-        </p:nvSpPr>
-        <p:spPr bwMode="auto">
-          <a:xfrm rot="0" flipH="0" flipV="0">
-            <a:off x="406399" y="3835398"/>
-            <a:ext cx="1625598" cy="406398"/>
-          </a:xfrm>
-          <a:prstGeom prst="rect">
-            <a:avLst/>
-          </a:prstGeom>
-          <a:noFill/>
-        </p:spPr>
-        <p:txBody>
-          <a:bodyPr vertOverflow="overflow" horzOverflow="overflow" vert="horz" wrap="square" lIns="91440" tIns="45720" rIns="91440" bIns="45720" numCol="1" spcCol="0" rtlCol="0" fromWordArt="0" anchor="ctr" anchorCtr="0" forceAA="0" upright="0" compatLnSpc="0">
-            <a:noAutofit/>
-          </a:bodyPr>
-          <a:p>
-            <a:pPr algn="ctr">
-              <a:defRPr/>
-            </a:pPr>
-            <a:r>
-              <a:rPr lang="it-IT" sz="1400" b="1">
-                <a:solidFill>
-                  <a:schemeClr val="bg2"/>
-                </a:solidFill>
-              </a:rPr>
-              <a:t>Market cap</a:t>
-            </a:r>
-            <a:endParaRPr sz="1400" b="1">
-              <a:solidFill>
-                <a:schemeClr val="bg2"/>
-              </a:solidFill>
-            </a:endParaRPr>
-          </a:p>
-        </p:txBody>
-      </p:sp>
-      <p:sp>
-        <p:nvSpPr>
-          <p:cNvPr id="2071912975" name=""/>
-          <p:cNvSpPr txBox="1"/>
-          <p:nvPr/>
-        </p:nvSpPr>
-        <p:spPr bwMode="auto">
-          <a:xfrm rot="0" flipH="0" flipV="0">
-            <a:off x="406398" y="4648199"/>
-            <a:ext cx="1625598" cy="406398"/>
-          </a:xfrm>
-          <a:prstGeom prst="rect">
-            <a:avLst/>
-          </a:prstGeom>
-          <a:noFill/>
-        </p:spPr>
-        <p:txBody>
-          <a:bodyPr vertOverflow="overflow" horzOverflow="overflow" vert="horz" wrap="square" lIns="91440" tIns="45720" rIns="91440" bIns="45720" numCol="1" spcCol="0" rtlCol="0" fromWordArt="0" anchor="ctr" anchorCtr="0" forceAA="0" upright="0" compatLnSpc="0">
-            <a:noAutofit/>
-          </a:bodyPr>
-          <a:p>
-            <a:pPr algn="ctr">
-              <a:defRPr/>
-            </a:pPr>
-            <a:r>
-              <a:rPr lang="it-IT" sz="1400" b="1">
-                <a:solidFill>
-                  <a:schemeClr val="bg2"/>
-                </a:solidFill>
-              </a:rPr>
-              <a:t>Share earnings</a:t>
-            </a:r>
-            <a:endParaRPr sz="1400" b="1">
-              <a:solidFill>
-                <a:schemeClr val="bg2"/>
-              </a:solidFill>
-            </a:endParaRPr>
-          </a:p>
-        </p:txBody>
-      </p:sp>
-      <p:sp>
-        <p:nvSpPr>
-          <p:cNvPr id="517513600" name=""/>
-          <p:cNvSpPr txBox="1"/>
-          <p:nvPr/>
-        </p:nvSpPr>
-        <p:spPr bwMode="auto">
-          <a:xfrm rot="0" flipH="0" flipV="0">
-            <a:off x="406398" y="4241841"/>
-            <a:ext cx="1625598" cy="406398"/>
-          </a:xfrm>
-          <a:prstGeom prst="rect">
-            <a:avLst/>
-          </a:prstGeom>
-          <a:noFill/>
-        </p:spPr>
-        <p:txBody>
-          <a:bodyPr vertOverflow="overflow" horzOverflow="overflow" vert="horz" wrap="square" lIns="91440" tIns="45720" rIns="91440" bIns="45720" numCol="1" spcCol="0" rtlCol="0" fromWordArt="0" anchor="ctr" anchorCtr="0" forceAA="0" upright="0" compatLnSpc="0">
-            <a:noAutofit/>
-          </a:bodyPr>
-          <a:p>
-            <a:pPr algn="ctr">
-              <a:defRPr/>
-            </a:pPr>
-            <a:r>
-              <a:rPr lang="it-IT" sz="1400" b="1">
-                <a:solidFill>
-                  <a:schemeClr val="bg2"/>
-                </a:solidFill>
-              </a:rPr>
-              <a:t>Share price</a:t>
-            </a:r>
-            <a:endParaRPr sz="1400" b="1">
-              <a:solidFill>
-                <a:schemeClr val="bg2"/>
-              </a:solidFill>
-            </a:endParaRPr>
-          </a:p>
-        </p:txBody>
-      </p:sp>
-      <p:sp>
-        <p:nvSpPr>
-          <p:cNvPr id="1068242799" name=""/>
-          <p:cNvSpPr txBox="1"/>
-          <p:nvPr/>
-        </p:nvSpPr>
-        <p:spPr bwMode="auto">
-          <a:xfrm rot="0" flipH="0" flipV="0">
-            <a:off x="406399" y="5054597"/>
-            <a:ext cx="1625598" cy="406398"/>
-          </a:xfrm>
-          <a:prstGeom prst="rect">
-            <a:avLst/>
-          </a:prstGeom>
-          <a:noFill/>
-        </p:spPr>
-        <p:txBody>
-          <a:bodyPr vertOverflow="overflow" horzOverflow="overflow" vert="horz" wrap="square" lIns="91440" tIns="45720" rIns="91440" bIns="45720" numCol="1" spcCol="0" rtlCol="0" fromWordArt="0" anchor="ctr" anchorCtr="0" forceAA="0" upright="0" compatLnSpc="0">
-            <a:noAutofit/>
-          </a:bodyPr>
-          <a:p>
-            <a:pPr algn="ctr">
-              <a:defRPr/>
-            </a:pPr>
-            <a:r>
-              <a:rPr lang="it-IT" sz="1400" b="1">
-                <a:solidFill>
-                  <a:schemeClr val="bg2"/>
-                </a:solidFill>
-              </a:rPr>
-              <a:t>Analyst rating</a:t>
-            </a:r>
-            <a:endParaRPr sz="1400" b="1">
-              <a:solidFill>
-                <a:schemeClr val="bg2"/>
-              </a:solidFill>
-            </a:endParaRPr>
-          </a:p>
-        </p:txBody>
-      </p:sp>
-      <p:sp>
-        <p:nvSpPr>
-          <p:cNvPr id="454257211" name=""/>
-          <p:cNvSpPr txBox="1"/>
-          <p:nvPr/>
-        </p:nvSpPr>
-        <p:spPr bwMode="auto">
-          <a:xfrm rot="0" flipH="0" flipV="0">
-            <a:off x="406399" y="3429040"/>
-            <a:ext cx="1625598" cy="406398"/>
-          </a:xfrm>
-          <a:prstGeom prst="rect">
-            <a:avLst/>
-          </a:prstGeom>
-          <a:noFill/>
-        </p:spPr>
-        <p:txBody>
-          <a:bodyPr vertOverflow="overflow" horzOverflow="overflow" vert="horz" wrap="square" lIns="91440" tIns="45720" rIns="91440" bIns="45720" numCol="1" spcCol="0" rtlCol="0" fromWordArt="0" anchor="ctr" anchorCtr="0" forceAA="0" upright="0" compatLnSpc="0">
-            <a:noAutofit/>
-          </a:bodyPr>
-          <a:p>
-            <a:pPr algn="ctr">
-              <a:defRPr/>
-            </a:pPr>
-            <a:r>
-              <a:rPr lang="it-IT" sz="1400" b="1">
-                <a:solidFill>
-                  <a:schemeClr val="bg2"/>
-                </a:solidFill>
-              </a:rPr>
-              <a:t>Industry</a:t>
-            </a:r>
-            <a:endParaRPr sz="1400" b="1">
-              <a:solidFill>
-                <a:schemeClr val="bg2"/>
-              </a:solidFill>
-            </a:endParaRPr>
-          </a:p>
-        </p:txBody>
-      </p:sp>
-      <p:cxnSp>
-        <p:nvCxnSpPr>
-          <p:cNvPr id="1145167389" name=""/>
-          <p:cNvCxnSpPr/>
-          <p:nvPr/>
-        </p:nvCxnSpPr>
-        <p:spPr bwMode="auto">
-          <a:xfrm rot="0" flipH="0" flipV="0">
-            <a:off x="609598" y="3429293"/>
-            <a:ext cx="1161141" cy="0"/>
-          </a:xfrm>
-          <a:prstGeom prst="line">
-            <a:avLst/>
-          </a:prstGeom>
-          <a:ln w="6350" cap="flat" cmpd="sng" algn="ctr">
-            <a:solidFill>
-              <a:schemeClr val="bg2"/>
             </a:solidFill>
             <a:prstDash val="solid"/>
             <a:miter lim="800000"/>
@@ -4379,21 +4022,21 @@
       </p:cxnSp>
       <p:cxnSp>
         <p:nvCxnSpPr>
-          <p:cNvPr id="254739192" name=""/>
+          <p:cNvPr id="1722590361" name=""/>
           <p:cNvCxnSpPr/>
           <p:nvPr/>
         </p:nvCxnSpPr>
         <p:spPr bwMode="auto">
-          <a:xfrm rot="0" flipH="0" flipV="0">
-            <a:off x="609598" y="3835692"/>
-            <a:ext cx="1161141" cy="0"/>
+          <a:xfrm flipH="0" flipV="0">
+            <a:off x="2235197" y="2616198"/>
+            <a:ext cx="2201333" cy="360"/>
           </a:xfrm>
           <a:prstGeom prst="line">
             <a:avLst/>
           </a:prstGeom>
           <a:ln w="6350" cap="flat" cmpd="sng" algn="ctr">
             <a:solidFill>
-              <a:schemeClr val="bg2"/>
+              <a:schemeClr val="tx2"/>
             </a:solidFill>
             <a:prstDash val="solid"/>
             <a:miter lim="800000"/>
@@ -4418,13 +4061,332 @@
       </p:cxnSp>
       <p:cxnSp>
         <p:nvCxnSpPr>
-          <p:cNvPr id="497740089" name=""/>
+          <p:cNvPr id="1375556874" name=""/>
           <p:cNvCxnSpPr/>
           <p:nvPr/>
         </p:nvCxnSpPr>
         <p:spPr bwMode="auto">
           <a:xfrm rot="0" flipH="0" flipV="0">
-            <a:off x="609598" y="4242093"/>
+            <a:off x="609598" y="3022958"/>
+            <a:ext cx="1161141" cy="0"/>
+          </a:xfrm>
+          <a:prstGeom prst="line">
+            <a:avLst/>
+          </a:prstGeom>
+          <a:ln w="6350" cap="flat" cmpd="sng" algn="ctr">
+            <a:solidFill>
+              <a:schemeClr val="bg2"/>
+            </a:solidFill>
+            <a:prstDash val="solid"/>
+            <a:miter lim="800000"/>
+          </a:ln>
+        </p:spPr>
+        <p:style>
+          <a:lnRef idx="1">
+            <a:schemeClr val="accent1">
+              <a:shade val="50000"/>
+            </a:schemeClr>
+          </a:lnRef>
+          <a:fillRef idx="0">
+            <a:schemeClr val="accent1"/>
+          </a:fillRef>
+          <a:effectRef idx="0">
+            <a:schemeClr val="accent1"/>
+          </a:effectRef>
+          <a:fontRef idx="minor">
+            <a:schemeClr val="tx1"/>
+          </a:fontRef>
+        </p:style>
+      </p:cxnSp>
+      <p:sp>
+        <p:nvSpPr>
+          <p:cNvPr id="1552248973" name=""/>
+          <p:cNvSpPr txBox="1"/>
+          <p:nvPr/>
+        </p:nvSpPr>
+        <p:spPr bwMode="auto">
+          <a:xfrm rot="0" flipH="0" flipV="0">
+            <a:off x="406398" y="2616197"/>
+            <a:ext cx="1422400" cy="406397"/>
+          </a:xfrm>
+          <a:prstGeom prst="rect">
+            <a:avLst/>
+          </a:prstGeom>
+          <a:noFill/>
+        </p:spPr>
+        <p:txBody>
+          <a:bodyPr vertOverflow="overflow" horzOverflow="overflow" vert="horz" wrap="square" lIns="45720" tIns="45720" rIns="45720" bIns="45720" numCol="1" spcCol="0" rtlCol="0" fromWordArt="0" anchor="ctr" anchorCtr="0" forceAA="0" upright="0" compatLnSpc="0">
+            <a:noAutofit/>
+          </a:bodyPr>
+          <a:p>
+            <a:pPr algn="r">
+              <a:defRPr/>
+            </a:pPr>
+            <a:r>
+              <a:rPr lang="it-IT" sz="1400" b="1">
+                <a:solidFill>
+                  <a:schemeClr val="bg2"/>
+                </a:solidFill>
+              </a:rPr>
+              <a:t>Symbol</a:t>
+            </a:r>
+            <a:endParaRPr sz="1400" b="1">
+              <a:solidFill>
+                <a:schemeClr val="bg2"/>
+              </a:solidFill>
+            </a:endParaRPr>
+          </a:p>
+        </p:txBody>
+      </p:sp>
+      <p:sp>
+        <p:nvSpPr>
+          <p:cNvPr id="691298402" name=""/>
+          <p:cNvSpPr txBox="1"/>
+          <p:nvPr/>
+        </p:nvSpPr>
+        <p:spPr bwMode="auto">
+          <a:xfrm rot="0" flipH="0" flipV="0">
+            <a:off x="406398" y="3022597"/>
+            <a:ext cx="1422400" cy="406397"/>
+          </a:xfrm>
+          <a:prstGeom prst="rect">
+            <a:avLst/>
+          </a:prstGeom>
+          <a:noFill/>
+        </p:spPr>
+        <p:txBody>
+          <a:bodyPr vertOverflow="overflow" horzOverflow="overflow" vert="horz" wrap="square" lIns="45720" tIns="45720" rIns="45720" bIns="45720" numCol="1" spcCol="0" rtlCol="0" fromWordArt="0" anchor="ctr" anchorCtr="0" forceAA="0" upright="0" compatLnSpc="0">
+            <a:noAutofit/>
+          </a:bodyPr>
+          <a:p>
+            <a:pPr algn="r">
+              <a:defRPr/>
+            </a:pPr>
+            <a:r>
+              <a:rPr lang="it-IT" sz="1400" b="1">
+                <a:solidFill>
+                  <a:schemeClr val="bg2"/>
+                </a:solidFill>
+              </a:rPr>
+              <a:t>Sector</a:t>
+            </a:r>
+            <a:endParaRPr sz="1400" b="1">
+              <a:solidFill>
+                <a:schemeClr val="bg2"/>
+              </a:solidFill>
+            </a:endParaRPr>
+          </a:p>
+        </p:txBody>
+      </p:sp>
+      <p:sp>
+        <p:nvSpPr>
+          <p:cNvPr id="1836217334" name=""/>
+          <p:cNvSpPr txBox="1"/>
+          <p:nvPr/>
+        </p:nvSpPr>
+        <p:spPr bwMode="auto">
+          <a:xfrm rot="0" flipH="0" flipV="0">
+            <a:off x="406398" y="3835397"/>
+            <a:ext cx="1422400" cy="406397"/>
+          </a:xfrm>
+          <a:prstGeom prst="rect">
+            <a:avLst/>
+          </a:prstGeom>
+          <a:noFill/>
+        </p:spPr>
+        <p:txBody>
+          <a:bodyPr vertOverflow="overflow" horzOverflow="overflow" vert="horz" wrap="square" lIns="45720" tIns="45720" rIns="45720" bIns="45720" numCol="1" spcCol="0" rtlCol="0" fromWordArt="0" anchor="ctr" anchorCtr="0" forceAA="0" upright="0" compatLnSpc="0">
+            <a:noAutofit/>
+          </a:bodyPr>
+          <a:p>
+            <a:pPr algn="r">
+              <a:defRPr/>
+            </a:pPr>
+            <a:r>
+              <a:rPr lang="it-IT" sz="1400" b="1">
+                <a:solidFill>
+                  <a:schemeClr val="bg2"/>
+                </a:solidFill>
+              </a:rPr>
+              <a:t>Market cap</a:t>
+            </a:r>
+            <a:endParaRPr sz="1400" b="1">
+              <a:solidFill>
+                <a:schemeClr val="bg2"/>
+              </a:solidFill>
+            </a:endParaRPr>
+          </a:p>
+        </p:txBody>
+      </p:sp>
+      <p:sp>
+        <p:nvSpPr>
+          <p:cNvPr id="1704239241" name=""/>
+          <p:cNvSpPr txBox="1"/>
+          <p:nvPr/>
+        </p:nvSpPr>
+        <p:spPr bwMode="auto">
+          <a:xfrm rot="0" flipH="0" flipV="0">
+            <a:off x="406397" y="4648197"/>
+            <a:ext cx="1422400" cy="406397"/>
+          </a:xfrm>
+          <a:prstGeom prst="rect">
+            <a:avLst/>
+          </a:prstGeom>
+          <a:noFill/>
+        </p:spPr>
+        <p:txBody>
+          <a:bodyPr vertOverflow="overflow" horzOverflow="overflow" vert="horz" wrap="square" lIns="45720" tIns="45720" rIns="45720" bIns="45720" numCol="1" spcCol="0" rtlCol="0" fromWordArt="0" anchor="ctr" anchorCtr="0" forceAA="0" upright="0" compatLnSpc="0">
+            <a:noAutofit/>
+          </a:bodyPr>
+          <a:p>
+            <a:pPr algn="r">
+              <a:defRPr/>
+            </a:pPr>
+            <a:r>
+              <a:rPr lang="it-IT" sz="1400" b="1">
+                <a:solidFill>
+                  <a:schemeClr val="bg2"/>
+                </a:solidFill>
+              </a:rPr>
+              <a:t>Share earnings</a:t>
+            </a:r>
+            <a:endParaRPr sz="1400" b="1">
+              <a:solidFill>
+                <a:schemeClr val="bg2"/>
+              </a:solidFill>
+            </a:endParaRPr>
+          </a:p>
+        </p:txBody>
+      </p:sp>
+      <p:sp>
+        <p:nvSpPr>
+          <p:cNvPr id="33485276" name=""/>
+          <p:cNvSpPr txBox="1"/>
+          <p:nvPr/>
+        </p:nvSpPr>
+        <p:spPr bwMode="auto">
+          <a:xfrm rot="0" flipH="0" flipV="0">
+            <a:off x="406397" y="4241840"/>
+            <a:ext cx="1422400" cy="406397"/>
+          </a:xfrm>
+          <a:prstGeom prst="rect">
+            <a:avLst/>
+          </a:prstGeom>
+          <a:noFill/>
+        </p:spPr>
+        <p:txBody>
+          <a:bodyPr vertOverflow="overflow" horzOverflow="overflow" vert="horz" wrap="square" lIns="45720" tIns="45720" rIns="45720" bIns="45720" numCol="1" spcCol="0" rtlCol="0" fromWordArt="0" anchor="ctr" anchorCtr="0" forceAA="0" upright="0" compatLnSpc="0">
+            <a:noAutofit/>
+          </a:bodyPr>
+          <a:p>
+            <a:pPr algn="r">
+              <a:defRPr/>
+            </a:pPr>
+            <a:r>
+              <a:rPr lang="it-IT" sz="1400" b="1">
+                <a:solidFill>
+                  <a:schemeClr val="bg2"/>
+                </a:solidFill>
+              </a:rPr>
+              <a:t>Share price</a:t>
+            </a:r>
+            <a:endParaRPr sz="1400" b="1">
+              <a:solidFill>
+                <a:schemeClr val="bg2"/>
+              </a:solidFill>
+            </a:endParaRPr>
+          </a:p>
+        </p:txBody>
+      </p:sp>
+      <p:sp>
+        <p:nvSpPr>
+          <p:cNvPr id="1992646365" name=""/>
+          <p:cNvSpPr txBox="1"/>
+          <p:nvPr/>
+        </p:nvSpPr>
+        <p:spPr bwMode="auto">
+          <a:xfrm rot="0" flipH="0" flipV="0">
+            <a:off x="406398" y="5054596"/>
+            <a:ext cx="1422400" cy="406397"/>
+          </a:xfrm>
+          <a:prstGeom prst="rect">
+            <a:avLst/>
+          </a:prstGeom>
+          <a:noFill/>
+        </p:spPr>
+        <p:txBody>
+          <a:bodyPr vertOverflow="overflow" horzOverflow="overflow" vert="horz" wrap="square" lIns="45720" tIns="45720" rIns="45720" bIns="45720" numCol="1" spcCol="0" rtlCol="0" fromWordArt="0" anchor="ctr" anchorCtr="0" forceAA="0" upright="0" compatLnSpc="0">
+            <a:noAutofit/>
+          </a:bodyPr>
+          <a:p>
+            <a:pPr algn="r">
+              <a:defRPr/>
+            </a:pPr>
+            <a:r>
+              <a:rPr lang="it-IT" sz="1400" b="1">
+                <a:solidFill>
+                  <a:schemeClr val="bg2"/>
+                </a:solidFill>
+              </a:rPr>
+              <a:t>Analyst rating</a:t>
+            </a:r>
+            <a:endParaRPr sz="1400" b="1">
+              <a:solidFill>
+                <a:schemeClr val="bg2"/>
+              </a:solidFill>
+            </a:endParaRPr>
+          </a:p>
+        </p:txBody>
+      </p:sp>
+      <p:sp>
+        <p:nvSpPr>
+          <p:cNvPr id="1085428826" name=""/>
+          <p:cNvSpPr txBox="1"/>
+          <p:nvPr/>
+        </p:nvSpPr>
+        <p:spPr bwMode="auto">
+          <a:xfrm rot="0" flipH="0" flipV="0">
+            <a:off x="406398" y="3429038"/>
+            <a:ext cx="1422400" cy="406397"/>
+          </a:xfrm>
+          <a:prstGeom prst="rect">
+            <a:avLst/>
+          </a:prstGeom>
+          <a:noFill/>
+        </p:spPr>
+        <p:txBody>
+          <a:bodyPr vertOverflow="overflow" horzOverflow="overflow" vert="horz" wrap="square" lIns="45720" tIns="45720" rIns="45720" bIns="45720" numCol="1" spcCol="0" rtlCol="0" fromWordArt="0" anchor="ctr" anchorCtr="0" forceAA="0" upright="0" compatLnSpc="0">
+            <a:noAutofit/>
+          </a:bodyPr>
+          <a:p>
+            <a:pPr algn="r">
+              <a:defRPr/>
+            </a:pPr>
+            <a:r>
+              <a:rPr lang="it-IT" sz="1400" b="1">
+                <a:solidFill>
+                  <a:schemeClr val="bg2"/>
+                </a:solidFill>
+              </a:rPr>
+              <a:t>Industry</a:t>
+            </a:r>
+            <a:endParaRPr sz="1400" b="1">
+              <a:solidFill>
+                <a:schemeClr val="bg2"/>
+              </a:solidFill>
+            </a:endParaRPr>
+          </a:p>
+        </p:txBody>
+      </p:sp>
+      <p:cxnSp>
+        <p:nvCxnSpPr>
+          <p:cNvPr id="1561485633" name=""/>
+          <p:cNvCxnSpPr/>
+          <p:nvPr/>
+        </p:nvCxnSpPr>
+        <p:spPr bwMode="auto">
+          <a:xfrm rot="0" flipH="0" flipV="0">
+            <a:off x="609598" y="3429293"/>
             <a:ext cx="1161141" cy="0"/>
           </a:xfrm>
           <a:prstGeom prst="line">
@@ -4457,13 +4419,13 @@
       </p:cxnSp>
       <p:cxnSp>
         <p:nvCxnSpPr>
-          <p:cNvPr id="1910376519" name=""/>
+          <p:cNvPr id="342926772" name=""/>
           <p:cNvCxnSpPr/>
           <p:nvPr/>
         </p:nvCxnSpPr>
         <p:spPr bwMode="auto">
           <a:xfrm rot="0" flipH="0" flipV="0">
-            <a:off x="609598" y="4648493"/>
+            <a:off x="609598" y="3835692"/>
             <a:ext cx="1161141" cy="0"/>
           </a:xfrm>
           <a:prstGeom prst="line">
@@ -4496,13 +4458,13 @@
       </p:cxnSp>
       <p:cxnSp>
         <p:nvCxnSpPr>
-          <p:cNvPr id="579037390" name=""/>
+          <p:cNvPr id="2024465147" name=""/>
           <p:cNvCxnSpPr/>
           <p:nvPr/>
         </p:nvCxnSpPr>
         <p:spPr bwMode="auto">
           <a:xfrm rot="0" flipH="0" flipV="0">
-            <a:off x="609598" y="5054893"/>
+            <a:off x="609598" y="4242093"/>
             <a:ext cx="1161141" cy="0"/>
           </a:xfrm>
           <a:prstGeom prst="line">
@@ -4535,13 +4497,13 @@
       </p:cxnSp>
       <p:cxnSp>
         <p:nvCxnSpPr>
-          <p:cNvPr id="1430113483" name=""/>
+          <p:cNvPr id="1404486673" name=""/>
           <p:cNvCxnSpPr/>
           <p:nvPr/>
         </p:nvCxnSpPr>
         <p:spPr bwMode="auto">
           <a:xfrm rot="0" flipH="0" flipV="0">
-            <a:off x="609598" y="2616557"/>
+            <a:off x="609598" y="4648493"/>
             <a:ext cx="1161141" cy="0"/>
           </a:xfrm>
           <a:prstGeom prst="line">
@@ -4572,16 +4534,94 @@
           </a:fontRef>
         </p:style>
       </p:cxnSp>
-      <p:sp>
-        <p:nvSpPr>
-          <p:cNvPr id="1602980569" name=""/>
+      <p:cxnSp>
+        <p:nvCxnSpPr>
+          <p:cNvPr id="1534977877" name=""/>
+          <p:cNvCxnSpPr/>
+          <p:nvPr/>
+        </p:nvCxnSpPr>
+        <p:spPr bwMode="auto">
+          <a:xfrm rot="0" flipH="0" flipV="0">
+            <a:off x="609598" y="5054893"/>
+            <a:ext cx="1161141" cy="0"/>
+          </a:xfrm>
+          <a:prstGeom prst="line">
+            <a:avLst/>
+          </a:prstGeom>
+          <a:ln w="6350" cap="flat" cmpd="sng" algn="ctr">
+            <a:solidFill>
+              <a:schemeClr val="bg2"/>
+            </a:solidFill>
+            <a:prstDash val="solid"/>
+            <a:miter lim="800000"/>
+          </a:ln>
+        </p:spPr>
+        <p:style>
+          <a:lnRef idx="1">
+            <a:schemeClr val="accent1">
+              <a:shade val="50000"/>
+            </a:schemeClr>
+          </a:lnRef>
+          <a:fillRef idx="0">
+            <a:schemeClr val="accent1"/>
+          </a:fillRef>
+          <a:effectRef idx="0">
+            <a:schemeClr val="accent1"/>
+          </a:effectRef>
+          <a:fontRef idx="minor">
+            <a:schemeClr val="tx1"/>
+          </a:fontRef>
+        </p:style>
+      </p:cxnSp>
+      <p:cxnSp>
+        <p:nvCxnSpPr>
+          <p:cNvPr id="576310425" name=""/>
+          <p:cNvCxnSpPr/>
+          <p:nvPr/>
+        </p:nvCxnSpPr>
+        <p:spPr bwMode="auto">
+          <a:xfrm rot="0" flipH="0" flipV="0">
+            <a:off x="609598" y="2616557"/>
+            <a:ext cx="1161141" cy="0"/>
+          </a:xfrm>
+          <a:prstGeom prst="line">
+            <a:avLst/>
+          </a:prstGeom>
+          <a:ln w="6350" cap="flat" cmpd="sng" algn="ctr">
+            <a:solidFill>
+              <a:schemeClr val="bg2"/>
+            </a:solidFill>
+            <a:prstDash val="solid"/>
+            <a:miter lim="800000"/>
+          </a:ln>
+        </p:spPr>
+        <p:style>
+          <a:lnRef idx="1">
+            <a:schemeClr val="accent1">
+              <a:shade val="50000"/>
+            </a:schemeClr>
+          </a:lnRef>
+          <a:fillRef idx="0">
+            <a:schemeClr val="accent1"/>
+          </a:fillRef>
+          <a:effectRef idx="0">
+            <a:schemeClr val="accent1"/>
+          </a:effectRef>
+          <a:fontRef idx="minor">
+            <a:schemeClr val="tx1"/>
+          </a:fontRef>
+        </p:style>
+      </p:cxnSp>
+      <p:sp>
+        <p:nvSpPr>
+          <p:cNvPr id="1557135517" name=""/>
           <p:cNvSpPr txBox="1"/>
           <p:nvPr/>
         </p:nvSpPr>
         <p:spPr bwMode="auto">
           <a:xfrm rot="0" flipH="0" flipV="0">
-            <a:off x="406399" y="2209799"/>
-            <a:ext cx="1625598" cy="406398"/>
+            <a:off x="406398" y="2209798"/>
+            <a:ext cx="1422400" cy="406397"/>
           </a:xfrm>
           <a:prstGeom prst="rect">
             <a:avLst/>
@@ -4589,11 +4629,11 @@
           <a:noFill/>
         </p:spPr>
         <p:txBody>
-          <a:bodyPr vertOverflow="overflow" horzOverflow="overflow" vert="horz" wrap="square" lIns="91440" tIns="45720" rIns="91440" bIns="45720" numCol="1" spcCol="0" rtlCol="0" fromWordArt="0" anchor="ctr" anchorCtr="0" forceAA="0" upright="0" compatLnSpc="0">
+          <a:bodyPr vertOverflow="overflow" horzOverflow="overflow" vert="horz" wrap="square" lIns="45720" tIns="45720" rIns="45720" bIns="45720" numCol="1" spcCol="0" rtlCol="0" fromWordArt="0" anchor="ctr" anchorCtr="0" forceAA="0" upright="0" compatLnSpc="0">
             <a:noAutofit/>
           </a:bodyPr>
           <a:p>
-            <a:pPr algn="ctr">
+            <a:pPr algn="r">
               <a:defRPr/>
             </a:pPr>
             <a:r>
@@ -4614,14 +4654,14 @@
       </p:sp>
       <p:sp>
         <p:nvSpPr>
-          <p:cNvPr id="1039575056" name=""/>
+          <p:cNvPr id="2052560678" name=""/>
           <p:cNvSpPr/>
           <p:nvPr/>
         </p:nvSpPr>
         <p:spPr bwMode="auto">
           <a:xfrm rot="0" flipH="0" flipV="0">
-            <a:off x="2031999" y="2006599"/>
-            <a:ext cx="2438399" cy="4063999"/>
+            <a:off x="2031998" y="2006598"/>
+            <a:ext cx="2641601" cy="4063998"/>
           </a:xfrm>
           <a:prstGeom prst="rect">
             <a:avLst/>
@@ -4663,7 +4703,7 @@
       </p:sp>
       <p:sp>
         <p:nvSpPr>
-          <p:cNvPr id="1654250155" name=""/>
+          <p:cNvPr id="447877121" name=""/>
           <p:cNvSpPr txBox="1"/>
           <p:nvPr/>
         </p:nvSpPr>
@@ -4703,7 +4743,7 @@
       </p:sp>
       <p:cxnSp>
         <p:nvCxnSpPr>
-          <p:cNvPr id="1301993114" name=""/>
+          <p:cNvPr id="1343916844" name=""/>
           <p:cNvCxnSpPr/>
           <p:nvPr/>
         </p:nvCxnSpPr>
@@ -4742,13 +4782,13 @@
       </p:cxnSp>
       <p:sp>
         <p:nvSpPr>
-          <p:cNvPr id="1833843586" name="revenue_growth"/>
+          <p:cNvPr id="1032403973" name="revenue_growth"/>
           <p:cNvSpPr txBox="1"/>
           <p:nvPr/>
         </p:nvSpPr>
         <p:spPr bwMode="auto">
           <a:xfrm rot="0" flipH="0" flipV="0">
-            <a:off x="6705598" y="4648197"/>
+            <a:off x="6705599" y="4648199"/>
             <a:ext cx="1422399" cy="609599"/>
           </a:xfrm>
           <a:prstGeom prst="rect">
@@ -4782,7 +4822,7 @@
       </p:sp>
       <p:sp>
         <p:nvSpPr>
-          <p:cNvPr id="1665607917" name=""/>
+          <p:cNvPr id="1706604966" name=""/>
           <p:cNvSpPr txBox="1"/>
           <p:nvPr/>
         </p:nvSpPr>
@@ -4822,7 +4862,7 @@
       </p:sp>
       <p:cxnSp>
         <p:nvCxnSpPr>
-          <p:cNvPr id="263357297" name=""/>
+          <p:cNvPr id="1473148575" name=""/>
           <p:cNvCxnSpPr/>
           <p:nvPr/>
         </p:nvCxnSpPr>
@@ -4861,7 +4901,7 @@
       </p:cxnSp>
       <p:sp>
         <p:nvSpPr>
-          <p:cNvPr id="1228881680" name="ltm_ebitda"/>
+          <p:cNvPr id="507556632" name="ltm_ebitda"/>
           <p:cNvSpPr txBox="1"/>
           <p:nvPr/>
         </p:nvSpPr>
@@ -4901,7 +4941,7 @@
       </p:sp>
       <p:sp>
         <p:nvSpPr>
-          <p:cNvPr id="1151377064" name=""/>
+          <p:cNvPr id="1406546257" name=""/>
           <p:cNvSpPr txBox="1"/>
           <p:nvPr/>
         </p:nvSpPr>
@@ -4941,7 +4981,7 @@
       </p:sp>
       <p:cxnSp>
         <p:nvCxnSpPr>
-          <p:cNvPr id="235541332" name=""/>
+          <p:cNvPr id="1643270927" name=""/>
           <p:cNvCxnSpPr/>
           <p:nvPr/>
         </p:nvCxnSpPr>
@@ -4980,13 +5020,13 @@
       </p:cxnSp>
       <p:sp>
         <p:nvSpPr>
-          <p:cNvPr id="1966572158" name="ebitda_margin"/>
+          <p:cNvPr id="1996340409" name="ebitda_margin"/>
           <p:cNvSpPr txBox="1"/>
           <p:nvPr/>
         </p:nvSpPr>
         <p:spPr bwMode="auto">
           <a:xfrm rot="0" flipH="0" flipV="0">
-            <a:off x="10363198" y="4648197"/>
+            <a:off x="10363199" y="4648199"/>
             <a:ext cx="1422399" cy="609599"/>
           </a:xfrm>
           <a:prstGeom prst="rect">
@@ -5020,7 +5060,7 @@
       </p:sp>
       <p:sp>
         <p:nvSpPr>
-          <p:cNvPr id="1348122927" name=""/>
+          <p:cNvPr id="321531210" name=""/>
           <p:cNvSpPr txBox="1"/>
           <p:nvPr/>
         </p:nvSpPr>
@@ -5060,7 +5100,7 @@
       </p:sp>
       <p:sp>
         <p:nvSpPr>
-          <p:cNvPr id="15882815" name=""/>
+          <p:cNvPr id="1141173304" name=""/>
           <p:cNvSpPr txBox="1"/>
           <p:nvPr/>
         </p:nvSpPr>
@@ -5102,14 +5142,14 @@
       </p:sp>
       <p:sp>
         <p:nvSpPr>
-          <p:cNvPr id="1102133196" name=""/>
+          <p:cNvPr id="1448213396" name=""/>
           <p:cNvSpPr txBox="1"/>
           <p:nvPr/>
         </p:nvSpPr>
         <p:spPr bwMode="auto">
           <a:xfrm rot="0" flipH="0" flipV="0">
-            <a:off x="406399" y="5460997"/>
-            <a:ext cx="1625598" cy="406398"/>
+            <a:off x="406398" y="5460996"/>
+            <a:ext cx="1422400" cy="406397"/>
           </a:xfrm>
           <a:prstGeom prst="rect">
             <a:avLst/>
@@ -5117,11 +5157,11 @@
           <a:noFill/>
         </p:spPr>
         <p:txBody>
-          <a:bodyPr vertOverflow="overflow" horzOverflow="overflow" vert="horz" wrap="square" lIns="91440" tIns="45720" rIns="91440" bIns="45720" numCol="1" spcCol="0" rtlCol="0" fromWordArt="0" anchor="ctr" anchorCtr="0" forceAA="0" upright="0" compatLnSpc="0">
+          <a:bodyPr vertOverflow="overflow" horzOverflow="overflow" vert="horz" wrap="square" lIns="45720" tIns="45720" rIns="45720" bIns="45720" numCol="1" spcCol="0" rtlCol="0" fromWordArt="0" anchor="ctr" anchorCtr="0" forceAA="0" upright="0" compatLnSpc="0">
             <a:noAutofit/>
           </a:bodyPr>
           <a:p>
-            <a:pPr algn="ctr">
+            <a:pPr algn="r">
               <a:defRPr/>
             </a:pPr>
             <a:r>
@@ -5140,49 +5180,9 @@
           </a:p>
         </p:txBody>
       </p:sp>
-      <p:sp>
-        <p:nvSpPr>
-          <p:cNvPr id="1674800406" name="beta"/>
-          <p:cNvSpPr txBox="1"/>
-          <p:nvPr/>
-        </p:nvSpPr>
-        <p:spPr bwMode="auto">
-          <a:xfrm rot="0" flipH="0" flipV="0">
-            <a:off x="2235199" y="5460999"/>
-            <a:ext cx="2031999" cy="406398"/>
-          </a:xfrm>
-          <a:prstGeom prst="rect">
-            <a:avLst/>
-          </a:prstGeom>
-          <a:noFill/>
-        </p:spPr>
-        <p:txBody>
-          <a:bodyPr vertOverflow="overflow" horzOverflow="overflow" vert="horz" wrap="square" lIns="91440" tIns="45720" rIns="91440" bIns="45720" numCol="1" spcCol="0" rtlCol="0" fromWordArt="0" anchor="ctr" anchorCtr="0" forceAA="0" upright="0" compatLnSpc="0">
-            <a:noAutofit/>
-          </a:bodyPr>
-          <a:p>
-            <a:pPr algn="ctr">
-              <a:defRPr/>
-            </a:pPr>
-            <a:r>
-              <a:rPr lang="it-IT" sz="1400" b="0">
-                <a:solidFill>
-                  <a:schemeClr val="tx2"/>
-                </a:solidFill>
-              </a:rPr>
-              <a:t>{share_beta}</a:t>
-            </a:r>
-            <a:endParaRPr sz="1400" b="0">
-              <a:solidFill>
-                <a:schemeClr val="tx2"/>
-              </a:solidFill>
-            </a:endParaRPr>
-          </a:p>
-        </p:txBody>
-      </p:sp>
       <p:cxnSp>
         <p:nvCxnSpPr>
-          <p:cNvPr id="1730411859" name=""/>
+          <p:cNvPr id="1099285135" name=""/>
           <p:cNvCxnSpPr/>
           <p:nvPr/>
         </p:nvCxnSpPr>
@@ -5221,14 +5221,14 @@
       </p:cxnSp>
       <p:cxnSp>
         <p:nvCxnSpPr>
-          <p:cNvPr id="2016724550" name=""/>
+          <p:cNvPr id="241755993" name=""/>
           <p:cNvCxnSpPr/>
           <p:nvPr/>
         </p:nvCxnSpPr>
         <p:spPr bwMode="auto">
           <a:xfrm rot="0" flipH="0" flipV="0">
-            <a:off x="2235199" y="5460596"/>
-            <a:ext cx="2031999" cy="399"/>
+            <a:off x="2235198" y="5460595"/>
+            <a:ext cx="2201334" cy="398"/>
           </a:xfrm>
           <a:prstGeom prst="line">
             <a:avLst/>
@@ -5293,14 +5293,14 @@
       </p:grpSpPr>
       <p:sp>
         <p:nvSpPr>
-          <p:cNvPr id="787154334" name=""/>
+          <p:cNvPr id="524336786" name=""/>
           <p:cNvSpPr/>
           <p:nvPr/>
         </p:nvSpPr>
         <p:spPr bwMode="auto">
           <a:xfrm rot="0" flipH="0" flipV="0">
-            <a:off x="10159999" y="2209799"/>
-            <a:ext cx="1625599" cy="3657600"/>
+            <a:off x="10159998" y="2006599"/>
+            <a:ext cx="1625598" cy="4063999"/>
           </a:xfrm>
           <a:prstGeom prst="rect">
             <a:avLst/>
@@ -5342,7 +5342,7 @@
       </p:sp>
       <p:sp>
         <p:nvSpPr>
-          <p:cNvPr id="38958326" name="Title 1"/>
+          <p:cNvPr id="1135031112" name="Title 1"/>
           <p:cNvSpPr>
             <a:spLocks noGrp="1"/>
           </p:cNvSpPr>
@@ -5390,7 +5390,7 @@
       </p:sp>
       <p:sp>
         <p:nvSpPr>
-          <p:cNvPr id="7965927" name="Footer Placeholder 4"/>
+          <p:cNvPr id="1624458533" name="Footer Placeholder 4"/>
           <p:cNvSpPr>
             <a:spLocks noGrp="1"/>
           </p:cNvSpPr>
@@ -5434,7 +5434,7 @@
       </p:sp>
       <p:sp>
         <p:nvSpPr>
-          <p:cNvPr id="97070708" name="Slide Number Placeholder 5"/>
+          <p:cNvPr id="752093369" name="Slide Number Placeholder 5"/>
           <p:cNvSpPr>
             <a:spLocks noGrp="1"/>
           </p:cNvSpPr>
@@ -5464,7 +5464,7 @@
       </p:sp>
       <p:cxnSp>
         <p:nvCxnSpPr>
-          <p:cNvPr id="1883026303" name=""/>
+          <p:cNvPr id="1983718754" name=""/>
           <p:cNvCxnSpPr/>
           <p:nvPr/>
         </p:nvCxnSpPr>
@@ -5503,7 +5503,7 @@
       </p:cxnSp>
       <p:cxnSp>
         <p:nvCxnSpPr>
-          <p:cNvPr id="1590595246" name=""/>
+          <p:cNvPr id="1449708119" name=""/>
           <p:cNvCxnSpPr/>
           <p:nvPr/>
         </p:nvCxnSpPr>
@@ -5542,7 +5542,7 @@
       </p:cxnSp>
       <p:sp>
         <p:nvSpPr>
-          <p:cNvPr id="88805837" name=""/>
+          <p:cNvPr id="1189736505" name=""/>
           <p:cNvSpPr txBox="1"/>
           <p:nvPr/>
         </p:nvSpPr>
@@ -5582,7 +5582,7 @@
       </p:sp>
       <p:sp>
         <p:nvSpPr>
-          <p:cNvPr id="1889527810" name=""/>
+          <p:cNvPr id="567371033" name=""/>
           <p:cNvSpPr txBox="1"/>
           <p:nvPr/>
         </p:nvSpPr>
@@ -5622,14 +5622,14 @@
       </p:sp>
       <p:sp>
         <p:nvSpPr>
-          <p:cNvPr id="1740258424" name=""/>
+          <p:cNvPr id="2017720773" name=""/>
           <p:cNvSpPr/>
           <p:nvPr/>
         </p:nvSpPr>
         <p:spPr bwMode="auto">
           <a:xfrm rot="0" flipH="0" flipV="0">
-            <a:off x="8534399" y="2209799"/>
-            <a:ext cx="1625599" cy="3657600"/>
+            <a:off x="8534398" y="2006599"/>
+            <a:ext cx="1625598" cy="4063999"/>
           </a:xfrm>
           <a:prstGeom prst="rect">
             <a:avLst/>
@@ -5675,13 +5675,13 @@
       </p:sp>
       <p:cxnSp>
         <p:nvCxnSpPr>
-          <p:cNvPr id="1561001197" name=""/>
+          <p:cNvPr id="364114105" name=""/>
           <p:cNvCxnSpPr/>
           <p:nvPr/>
         </p:nvCxnSpPr>
         <p:spPr bwMode="auto">
           <a:xfrm flipH="0" flipV="0">
-            <a:off x="10363197" y="3835401"/>
+            <a:off x="10363196" y="4038306"/>
             <a:ext cx="1219198" cy="293"/>
           </a:xfrm>
           <a:prstGeom prst="line">
@@ -5714,13 +5714,13 @@
       </p:cxnSp>
       <p:cxnSp>
         <p:nvCxnSpPr>
-          <p:cNvPr id="445240486" name=""/>
+          <p:cNvPr id="75933700" name=""/>
           <p:cNvCxnSpPr/>
           <p:nvPr/>
         </p:nvCxnSpPr>
         <p:spPr bwMode="auto">
           <a:xfrm flipH="0" flipV="0">
-            <a:off x="10363197" y="4241800"/>
+            <a:off x="10363196" y="4444704"/>
             <a:ext cx="1219198" cy="293"/>
           </a:xfrm>
           <a:prstGeom prst="line">
@@ -5753,13 +5753,13 @@
       </p:cxnSp>
       <p:cxnSp>
         <p:nvCxnSpPr>
-          <p:cNvPr id="619026643" name=""/>
+          <p:cNvPr id="1870949983" name=""/>
           <p:cNvCxnSpPr/>
           <p:nvPr/>
         </p:nvCxnSpPr>
         <p:spPr bwMode="auto">
           <a:xfrm flipH="0" flipV="0">
-            <a:off x="10363197" y="4648201"/>
+            <a:off x="10363196" y="4851105"/>
             <a:ext cx="1219198" cy="293"/>
           </a:xfrm>
           <a:prstGeom prst="line">
@@ -5792,13 +5792,13 @@
       </p:cxnSp>
       <p:cxnSp>
         <p:nvCxnSpPr>
-          <p:cNvPr id="800591909" name=""/>
+          <p:cNvPr id="287089454" name=""/>
           <p:cNvCxnSpPr/>
           <p:nvPr/>
         </p:nvCxnSpPr>
         <p:spPr bwMode="auto">
           <a:xfrm flipH="0" flipV="0">
-            <a:off x="10363197" y="5054601"/>
+            <a:off x="10363196" y="5257505"/>
             <a:ext cx="1219198" cy="293"/>
           </a:xfrm>
           <a:prstGeom prst="line">
@@ -5831,13 +5831,13 @@
       </p:cxnSp>
       <p:cxnSp>
         <p:nvCxnSpPr>
-          <p:cNvPr id="630299291" name=""/>
+          <p:cNvPr id="359118953" name=""/>
           <p:cNvCxnSpPr/>
           <p:nvPr/>
         </p:nvCxnSpPr>
         <p:spPr bwMode="auto">
           <a:xfrm flipH="0" flipV="0">
-            <a:off x="10363197" y="5461002"/>
+            <a:off x="10363196" y="5663907"/>
             <a:ext cx="1219198" cy="293"/>
           </a:xfrm>
           <a:prstGeom prst="line">
@@ -5870,7 +5870,7 @@
       </p:cxnSp>
       <p:sp>
         <p:nvSpPr>
-          <p:cNvPr id="1335092612" name="mean_price"/>
+          <p:cNvPr id="601804328" name="mean_price"/>
           <p:cNvSpPr txBox="1"/>
           <p:nvPr/>
         </p:nvSpPr>
@@ -5893,14 +5893,14 @@
               <a:defRPr/>
             </a:pPr>
             <a:r>
-              <a:rPr lang="it-IT" sz="1400" b="1">
+              <a:rPr lang="it-IT" sz="1600" b="1">
                 <a:solidFill>
                   <a:schemeClr val="accent2"/>
                 </a:solidFill>
               </a:rPr>
               <a:t>XXX</a:t>
             </a:r>
-            <a:endParaRPr sz="1400" b="1">
+            <a:endParaRPr sz="1600" b="1">
               <a:solidFill>
                 <a:schemeClr val="accent2"/>
               </a:solidFill>
@@ -5910,13 +5910,13 @@
       </p:sp>
       <p:sp>
         <p:nvSpPr>
-          <p:cNvPr id="736418303" name="max_price"/>
+          <p:cNvPr id="1113173244" name="max_price"/>
           <p:cNvSpPr txBox="1"/>
           <p:nvPr/>
         </p:nvSpPr>
         <p:spPr bwMode="auto">
           <a:xfrm rot="0" flipH="0" flipV="0">
-            <a:off x="10363198" y="3429001"/>
+            <a:off x="10363198" y="3631905"/>
             <a:ext cx="1219199" cy="406399"/>
           </a:xfrm>
           <a:prstGeom prst="rect">
@@ -5950,13 +5950,53 @@
       </p:sp>
       <p:sp>
         <p:nvSpPr>
-          <p:cNvPr id="944744829" name="q50_price"/>
+          <p:cNvPr id="422680264" name="50p_price"/>
           <p:cNvSpPr txBox="1"/>
           <p:nvPr/>
         </p:nvSpPr>
         <p:spPr bwMode="auto">
           <a:xfrm rot="0" flipH="0" flipV="0">
-            <a:off x="10363198" y="4241800"/>
+            <a:off x="10363198" y="4444704"/>
+            <a:ext cx="1219199" cy="406399"/>
+          </a:xfrm>
+          <a:prstGeom prst="rect">
+            <a:avLst/>
+          </a:prstGeom>
+          <a:noFill/>
+        </p:spPr>
+        <p:txBody>
+          <a:bodyPr vertOverflow="overflow" horzOverflow="overflow" vert="horz" wrap="square" lIns="91440" tIns="45720" rIns="91440" bIns="45720" numCol="1" spcCol="0" rtlCol="0" fromWordArt="0" anchor="ctr" anchorCtr="0" forceAA="0" upright="0" compatLnSpc="0">
+            <a:noAutofit/>
+          </a:bodyPr>
+          <a:p>
+            <a:pPr algn="ctr">
+              <a:defRPr/>
+            </a:pPr>
+            <a:r>
+              <a:rPr lang="it-IT" sz="1400" b="1">
+                <a:solidFill>
+                  <a:schemeClr val="tx2"/>
+                </a:solidFill>
+              </a:rPr>
+              <a:t>XXX</a:t>
+            </a:r>
+            <a:endParaRPr sz="1400" b="1">
+              <a:solidFill>
+                <a:schemeClr val="tx2"/>
+              </a:solidFill>
+            </a:endParaRPr>
+          </a:p>
+        </p:txBody>
+      </p:sp>
+      <p:sp>
+        <p:nvSpPr>
+          <p:cNvPr id="2103712519" name="25p_price"/>
+          <p:cNvSpPr txBox="1"/>
+          <p:nvPr/>
+        </p:nvSpPr>
+        <p:spPr bwMode="auto">
+          <a:xfrm rot="0" flipH="0" flipV="0">
+            <a:off x="10363198" y="4851103"/>
             <a:ext cx="1219199" cy="406399"/>
           </a:xfrm>
           <a:prstGeom prst="rect">
@@ -5990,13 +6030,13 @@
       </p:sp>
       <p:sp>
         <p:nvSpPr>
-          <p:cNvPr id="999820369" name="q25_price"/>
+          <p:cNvPr id="1387102660" name="min_price"/>
           <p:cNvSpPr txBox="1"/>
           <p:nvPr/>
         </p:nvSpPr>
         <p:spPr bwMode="auto">
           <a:xfrm rot="0" flipH="0" flipV="0">
-            <a:off x="10363198" y="4648201"/>
+            <a:off x="10363198" y="5257503"/>
             <a:ext cx="1219199" cy="406399"/>
           </a:xfrm>
           <a:prstGeom prst="rect">
@@ -6030,13 +6070,13 @@
       </p:sp>
       <p:sp>
         <p:nvSpPr>
-          <p:cNvPr id="343962704" name="min_price"/>
+          <p:cNvPr id="226626208" name="std_price"/>
           <p:cNvSpPr txBox="1"/>
           <p:nvPr/>
         </p:nvSpPr>
         <p:spPr bwMode="auto">
           <a:xfrm rot="0" flipH="0" flipV="0">
-            <a:off x="10363198" y="5054601"/>
+            <a:off x="10363198" y="5664200"/>
             <a:ext cx="1219199" cy="406399"/>
           </a:xfrm>
           <a:prstGeom prst="rect">
@@ -6058,7 +6098,7 @@
                   <a:schemeClr val="tx2"/>
                 </a:solidFill>
               </a:rPr>
-              <a:t>XXX</a:t>
+              <a:t>XX</a:t>
             </a:r>
             <a:endParaRPr sz="1400" b="0">
               <a:solidFill>
@@ -6070,13 +6110,13 @@
       </p:sp>
       <p:sp>
         <p:nvSpPr>
-          <p:cNvPr id="1385891762" name="std_price"/>
+          <p:cNvPr id="1532409047" name="75p_price"/>
           <p:cNvSpPr txBox="1"/>
           <p:nvPr/>
         </p:nvSpPr>
         <p:spPr bwMode="auto">
           <a:xfrm rot="0" flipH="0" flipV="0">
-            <a:off x="10363198" y="5461000"/>
+            <a:off x="10363198" y="4038303"/>
             <a:ext cx="1219199" cy="406399"/>
           </a:xfrm>
           <a:prstGeom prst="rect">
@@ -6098,7 +6138,7 @@
                   <a:schemeClr val="tx2"/>
                 </a:solidFill>
               </a:rPr>
-              <a:t>XX</a:t>
+              <a:t>XXX</a:t>
             </a:r>
             <a:endParaRPr sz="1400" b="0">
               <a:solidFill>
@@ -6108,61 +6148,21 @@
           </a:p>
         </p:txBody>
       </p:sp>
-      <p:sp>
-        <p:nvSpPr>
-          <p:cNvPr id="179412635" name="q75_price"/>
-          <p:cNvSpPr txBox="1"/>
-          <p:nvPr/>
-        </p:nvSpPr>
-        <p:spPr bwMode="auto">
-          <a:xfrm rot="0" flipH="0" flipV="0">
-            <a:off x="10363198" y="3835401"/>
-            <a:ext cx="1219199" cy="406399"/>
-          </a:xfrm>
-          <a:prstGeom prst="rect">
-            <a:avLst/>
-          </a:prstGeom>
-          <a:noFill/>
-        </p:spPr>
-        <p:txBody>
-          <a:bodyPr vertOverflow="overflow" horzOverflow="overflow" vert="horz" wrap="square" lIns="91440" tIns="45720" rIns="91440" bIns="45720" numCol="1" spcCol="0" rtlCol="0" fromWordArt="0" anchor="ctr" anchorCtr="0" forceAA="0" upright="0" compatLnSpc="0">
-            <a:noAutofit/>
-          </a:bodyPr>
-          <a:p>
-            <a:pPr algn="ctr">
-              <a:defRPr/>
-            </a:pPr>
-            <a:r>
-              <a:rPr lang="it-IT" sz="1400" b="0">
-                <a:solidFill>
-                  <a:schemeClr val="tx2"/>
-                </a:solidFill>
-              </a:rPr>
-              <a:t>XXX</a:t>
-            </a:r>
-            <a:endParaRPr sz="1400" b="0">
-              <a:solidFill>
-                <a:schemeClr val="tx2"/>
-              </a:solidFill>
-            </a:endParaRPr>
-          </a:p>
-        </p:txBody>
-      </p:sp>
       <p:cxnSp>
         <p:nvCxnSpPr>
-          <p:cNvPr id="707864907" name=""/>
+          <p:cNvPr id="300127118" name=""/>
           <p:cNvCxnSpPr/>
           <p:nvPr/>
         </p:nvCxnSpPr>
         <p:spPr bwMode="auto">
           <a:xfrm flipH="0" flipV="0">
-            <a:off x="10363197" y="3429001"/>
+            <a:off x="10363196" y="3631839"/>
             <a:ext cx="1219198" cy="360"/>
           </a:xfrm>
           <a:prstGeom prst="line">
             <a:avLst/>
           </a:prstGeom>
-          <a:ln w="6350" cap="flat" cmpd="sng" algn="ctr">
+          <a:ln w="12700" cap="flat" cmpd="sng" algn="ctr">
             <a:solidFill>
               <a:schemeClr val="tx2"/>
             </a:solidFill>
@@ -6189,13 +6189,13 @@
       </p:cxnSp>
       <p:cxnSp>
         <p:nvCxnSpPr>
-          <p:cNvPr id="1628565964" name=""/>
+          <p:cNvPr id="846535500" name=""/>
           <p:cNvCxnSpPr/>
           <p:nvPr/>
         </p:nvCxnSpPr>
         <p:spPr bwMode="auto">
           <a:xfrm flipH="0" flipV="0">
-            <a:off x="10363197" y="2616197"/>
+            <a:off x="10363196" y="2616199"/>
             <a:ext cx="1219198" cy="360"/>
           </a:xfrm>
           <a:prstGeom prst="line">
@@ -6228,13 +6228,13 @@
       </p:cxnSp>
       <p:sp>
         <p:nvSpPr>
-          <p:cNvPr id="1082822120" name="current_price"/>
+          <p:cNvPr id="318771442" name="current_price"/>
           <p:cNvSpPr txBox="1"/>
           <p:nvPr/>
         </p:nvSpPr>
         <p:spPr bwMode="auto">
           <a:xfrm rot="0" flipH="0" flipV="0">
-            <a:off x="10363198" y="2209800"/>
+            <a:off x="10363198" y="2209799"/>
             <a:ext cx="1219199" cy="406399"/>
           </a:xfrm>
           <a:prstGeom prst="rect">
@@ -6251,14 +6251,14 @@
               <a:defRPr/>
             </a:pPr>
             <a:r>
-              <a:rPr lang="it-IT" sz="1400" b="1">
+              <a:rPr lang="it-IT" sz="1600" b="1">
                 <a:solidFill>
                   <a:schemeClr val="tx2"/>
                 </a:solidFill>
               </a:rPr>
               <a:t>XXX</a:t>
             </a:r>
-            <a:endParaRPr sz="1400" b="1">
+            <a:endParaRPr sz="1600" b="1">
               <a:solidFill>
                 <a:schemeClr val="tx2"/>
               </a:solidFill>
@@ -6268,19 +6268,19 @@
       </p:sp>
       <p:cxnSp>
         <p:nvCxnSpPr>
-          <p:cNvPr id="543315406" name=""/>
+          <p:cNvPr id="2051717198" name=""/>
           <p:cNvCxnSpPr/>
           <p:nvPr/>
         </p:nvCxnSpPr>
         <p:spPr bwMode="auto">
           <a:xfrm rot="0" flipH="0" flipV="0">
-            <a:off x="8737597" y="3429360"/>
+            <a:off x="8737596" y="3632018"/>
             <a:ext cx="1161142" cy="0"/>
           </a:xfrm>
           <a:prstGeom prst="line">
             <a:avLst/>
           </a:prstGeom>
-          <a:ln w="6350" cap="flat" cmpd="sng" algn="ctr">
+          <a:ln w="12700" cap="flat" cmpd="sng" algn="ctr">
             <a:solidFill>
               <a:schemeClr val="bg2"/>
             </a:solidFill>
@@ -6307,13 +6307,13 @@
       </p:cxnSp>
       <p:sp>
         <p:nvSpPr>
-          <p:cNvPr id="1460006964" name=""/>
+          <p:cNvPr id="25042347" name=""/>
           <p:cNvSpPr txBox="1"/>
           <p:nvPr/>
         </p:nvSpPr>
         <p:spPr bwMode="auto">
           <a:xfrm rot="0" flipH="0" flipV="0">
-            <a:off x="8534398" y="3022599"/>
+            <a:off x="8534397" y="3022599"/>
             <a:ext cx="1625599" cy="406399"/>
           </a:xfrm>
           <a:prstGeom prst="rect">
@@ -6347,13 +6347,13 @@
       </p:sp>
       <p:sp>
         <p:nvSpPr>
-          <p:cNvPr id="1413662406" name=""/>
+          <p:cNvPr id="694949573" name=""/>
           <p:cNvSpPr txBox="1"/>
           <p:nvPr/>
         </p:nvSpPr>
         <p:spPr bwMode="auto">
           <a:xfrm rot="0" flipH="0" flipV="0">
-            <a:off x="8534398" y="3429000"/>
+            <a:off x="8534397" y="3631905"/>
             <a:ext cx="1625599" cy="406399"/>
           </a:xfrm>
           <a:prstGeom prst="rect">
@@ -6387,13 +6387,13 @@
       </p:sp>
       <p:sp>
         <p:nvSpPr>
-          <p:cNvPr id="2073984651" name=""/>
+          <p:cNvPr id="975914889" name=""/>
           <p:cNvSpPr txBox="1"/>
           <p:nvPr/>
         </p:nvSpPr>
         <p:spPr bwMode="auto">
           <a:xfrm rot="0" flipH="0" flipV="0">
-            <a:off x="8534398" y="4241800"/>
+            <a:off x="8534397" y="4444704"/>
             <a:ext cx="1625599" cy="406399"/>
           </a:xfrm>
           <a:prstGeom prst="rect">
@@ -6427,13 +6427,13 @@
       </p:sp>
       <p:sp>
         <p:nvSpPr>
-          <p:cNvPr id="1966669504" name=""/>
+          <p:cNvPr id="1031496555" name=""/>
           <p:cNvSpPr txBox="1"/>
           <p:nvPr/>
         </p:nvSpPr>
         <p:spPr bwMode="auto">
           <a:xfrm rot="0" flipH="0" flipV="0">
-            <a:off x="8534398" y="4648200"/>
+            <a:off x="8534397" y="4851104"/>
             <a:ext cx="1625599" cy="406399"/>
           </a:xfrm>
           <a:prstGeom prst="rect">
@@ -6467,13 +6467,13 @@
       </p:sp>
       <p:sp>
         <p:nvSpPr>
-          <p:cNvPr id="711701610" name=""/>
+          <p:cNvPr id="1184547555" name=""/>
           <p:cNvSpPr txBox="1"/>
           <p:nvPr/>
         </p:nvSpPr>
         <p:spPr bwMode="auto">
           <a:xfrm rot="0" flipH="0" flipV="0">
-            <a:off x="8534398" y="5054643"/>
+            <a:off x="8534397" y="5257548"/>
             <a:ext cx="1625599" cy="406399"/>
           </a:xfrm>
           <a:prstGeom prst="rect">
@@ -6507,13 +6507,13 @@
       </p:sp>
       <p:sp>
         <p:nvSpPr>
-          <p:cNvPr id="115694921" name=""/>
+          <p:cNvPr id="1254791309" name=""/>
           <p:cNvSpPr txBox="1"/>
           <p:nvPr/>
         </p:nvSpPr>
         <p:spPr bwMode="auto">
           <a:xfrm rot="0" flipH="0" flipV="0">
-            <a:off x="8534398" y="5460999"/>
+            <a:off x="8534397" y="5664200"/>
             <a:ext cx="1625599" cy="406399"/>
           </a:xfrm>
           <a:prstGeom prst="rect">
@@ -6547,13 +6547,13 @@
       </p:sp>
       <p:sp>
         <p:nvSpPr>
-          <p:cNvPr id="854468112" name=""/>
+          <p:cNvPr id="842261242" name=""/>
           <p:cNvSpPr txBox="1"/>
           <p:nvPr/>
         </p:nvSpPr>
         <p:spPr bwMode="auto">
           <a:xfrm rot="0" flipH="0" flipV="0">
-            <a:off x="8534398" y="3835442"/>
+            <a:off x="8534397" y="4038346"/>
             <a:ext cx="1625599" cy="406399"/>
           </a:xfrm>
           <a:prstGeom prst="rect">
@@ -6587,13 +6587,13 @@
       </p:sp>
       <p:cxnSp>
         <p:nvCxnSpPr>
-          <p:cNvPr id="1507752585" name=""/>
+          <p:cNvPr id="1948762917" name=""/>
           <p:cNvCxnSpPr/>
           <p:nvPr/>
         </p:nvCxnSpPr>
         <p:spPr bwMode="auto">
           <a:xfrm rot="0" flipH="0" flipV="0">
-            <a:off x="8737597" y="3835695"/>
+            <a:off x="8737596" y="4038598"/>
             <a:ext cx="1161142" cy="0"/>
           </a:xfrm>
           <a:prstGeom prst="line">
@@ -6626,13 +6626,13 @@
       </p:cxnSp>
       <p:cxnSp>
         <p:nvCxnSpPr>
-          <p:cNvPr id="919659940" name=""/>
+          <p:cNvPr id="1265538732" name=""/>
           <p:cNvCxnSpPr/>
           <p:nvPr/>
         </p:nvCxnSpPr>
         <p:spPr bwMode="auto">
           <a:xfrm rot="0" flipH="0" flipV="0">
-            <a:off x="8737597" y="4242096"/>
+            <a:off x="8737596" y="4445001"/>
             <a:ext cx="1161142" cy="0"/>
           </a:xfrm>
           <a:prstGeom prst="line">
@@ -6665,13 +6665,13 @@
       </p:cxnSp>
       <p:cxnSp>
         <p:nvCxnSpPr>
-          <p:cNvPr id="2051689803" name=""/>
+          <p:cNvPr id="263946857" name=""/>
           <p:cNvCxnSpPr/>
           <p:nvPr/>
         </p:nvCxnSpPr>
         <p:spPr bwMode="auto">
           <a:xfrm rot="0" flipH="0" flipV="0">
-            <a:off x="8737597" y="4648495"/>
+            <a:off x="8737596" y="4851399"/>
             <a:ext cx="1161142" cy="0"/>
           </a:xfrm>
           <a:prstGeom prst="line">
@@ -6704,13 +6704,13 @@
       </p:cxnSp>
       <p:cxnSp>
         <p:nvCxnSpPr>
-          <p:cNvPr id="1092770703" name=""/>
+          <p:cNvPr id="1557598736" name=""/>
           <p:cNvCxnSpPr/>
           <p:nvPr/>
         </p:nvCxnSpPr>
         <p:spPr bwMode="auto">
           <a:xfrm rot="0" flipH="0" flipV="0">
-            <a:off x="8737597" y="5054895"/>
+            <a:off x="8737596" y="5257800"/>
             <a:ext cx="1161142" cy="0"/>
           </a:xfrm>
           <a:prstGeom prst="line">
@@ -6743,13 +6743,13 @@
       </p:cxnSp>
       <p:cxnSp>
         <p:nvCxnSpPr>
-          <p:cNvPr id="232203215" name=""/>
+          <p:cNvPr id="342379712" name=""/>
           <p:cNvCxnSpPr/>
           <p:nvPr/>
         </p:nvCxnSpPr>
         <p:spPr bwMode="auto">
           <a:xfrm rot="0" flipH="0" flipV="0">
-            <a:off x="8737597" y="5461295"/>
+            <a:off x="8737596" y="5664199"/>
             <a:ext cx="1161142" cy="0"/>
           </a:xfrm>
           <a:prstGeom prst="line">
@@ -6782,13 +6782,13 @@
       </p:cxnSp>
       <p:cxnSp>
         <p:nvCxnSpPr>
-          <p:cNvPr id="1341836090" name=""/>
+          <p:cNvPr id="431829165" name=""/>
           <p:cNvCxnSpPr/>
           <p:nvPr/>
         </p:nvCxnSpPr>
         <p:spPr bwMode="auto">
           <a:xfrm rot="0" flipH="0" flipV="0">
-            <a:off x="8737597" y="2616556"/>
+            <a:off x="8737596" y="2616379"/>
             <a:ext cx="1161142" cy="0"/>
           </a:xfrm>
           <a:prstGeom prst="line">
@@ -6821,13 +6821,13 @@
       </p:cxnSp>
       <p:sp>
         <p:nvSpPr>
-          <p:cNvPr id="1583889626" name=""/>
+          <p:cNvPr id="1831667334" name=""/>
           <p:cNvSpPr txBox="1"/>
           <p:nvPr/>
         </p:nvSpPr>
         <p:spPr bwMode="auto">
           <a:xfrm rot="0" flipH="0" flipV="0">
-            <a:off x="8534398" y="2209800"/>
+            <a:off x="8534397" y="2209799"/>
             <a:ext cx="1625599" cy="406399"/>
           </a:xfrm>
           <a:prstGeom prst="rect">
@@ -6861,13 +6861,13 @@
       </p:sp>
       <p:cxnSp>
         <p:nvCxnSpPr>
-          <p:cNvPr id="2705755" name=""/>
+          <p:cNvPr id="1605118650" name=""/>
           <p:cNvCxnSpPr/>
           <p:nvPr/>
         </p:nvCxnSpPr>
         <p:spPr bwMode="auto">
           <a:xfrm flipH="0" flipV="0">
-            <a:off x="10363197" y="3022599"/>
+            <a:off x="10363196" y="3022599"/>
             <a:ext cx="1219197" cy="360"/>
           </a:xfrm>
           <a:prstGeom prst="line">
@@ -6900,13 +6900,13 @@
       </p:cxnSp>
       <p:cxnSp>
         <p:nvCxnSpPr>
-          <p:cNvPr id="1657963124" name=""/>
+          <p:cNvPr id="32163692" name=""/>
           <p:cNvCxnSpPr/>
           <p:nvPr/>
         </p:nvCxnSpPr>
         <p:spPr bwMode="auto">
           <a:xfrm rot="0" flipH="0" flipV="0">
-            <a:off x="8737597" y="3022958"/>
+            <a:off x="8737596" y="3022779"/>
             <a:ext cx="1161141" cy="0"/>
           </a:xfrm>
           <a:prstGeom prst="line">
@@ -6939,13 +6939,13 @@
       </p:cxnSp>
       <p:sp>
         <p:nvSpPr>
-          <p:cNvPr id="1831143197" name="analyst_expectation"/>
+          <p:cNvPr id="1448254650" name="analyst_expectation"/>
           <p:cNvSpPr txBox="1"/>
           <p:nvPr/>
         </p:nvSpPr>
         <p:spPr bwMode="auto">
           <a:xfrm rot="0" flipH="0" flipV="0">
-            <a:off x="10363199" y="2616199"/>
+            <a:off x="10363198" y="2616200"/>
             <a:ext cx="1219198" cy="406398"/>
           </a:xfrm>
           <a:prstGeom prst="rect">
@@ -6962,14 +6962,14 @@
               <a:defRPr/>
             </a:pPr>
             <a:r>
-              <a:rPr lang="it-IT" sz="1400" b="1">
+              <a:rPr lang="it-IT" sz="1600" b="1">
                 <a:solidFill>
                   <a:schemeClr val="accent6"/>
                 </a:solidFill>
               </a:rPr>
               <a:t>XXX</a:t>
             </a:r>
-            <a:endParaRPr sz="1400" b="1">
+            <a:endParaRPr sz="1600" b="1">
               <a:solidFill>
                 <a:schemeClr val="accent6"/>
               </a:solidFill>
@@ -6979,13 +6979,13 @@
       </p:sp>
       <p:sp>
         <p:nvSpPr>
-          <p:cNvPr id="416438836" name=""/>
+          <p:cNvPr id="1992112545" name=""/>
           <p:cNvSpPr txBox="1"/>
           <p:nvPr/>
         </p:nvSpPr>
         <p:spPr bwMode="auto">
           <a:xfrm rot="0" flipH="0" flipV="0">
-            <a:off x="8534398" y="2616199"/>
+            <a:off x="8534397" y="2616199"/>
             <a:ext cx="1625598" cy="406398"/>
           </a:xfrm>
           <a:prstGeom prst="rect">
@@ -7019,7 +7019,7 @@
       </p:sp>
       <p:pic>
         <p:nvPicPr>
-          <p:cNvPr id="118468132" name="price_chart" descr="image.png"/>
+          <p:cNvPr id="1664522516" name="price_chart" descr="image.png"/>
           <p:cNvPicPr>
             <a:picLocks noChangeAspect="1"/>
           </p:cNvPicPr>
@@ -7041,14 +7041,14 @@
       </p:pic>
       <p:sp>
         <p:nvSpPr>
-          <p:cNvPr id="101370938" name=""/>
+          <p:cNvPr id="1970398027" name=""/>
           <p:cNvSpPr/>
           <p:nvPr/>
         </p:nvSpPr>
         <p:spPr bwMode="auto">
           <a:xfrm rot="0" flipH="0" flipV="0">
-            <a:off x="3454398" y="6273798"/>
-            <a:ext cx="203199" cy="406399"/>
+            <a:off x="3454398" y="6273799"/>
+            <a:ext cx="406399" cy="101599"/>
           </a:xfrm>
           <a:prstGeom prst="rect">
             <a:avLst/>
@@ -7081,13 +7081,13 @@
       </p:sp>
       <p:sp>
         <p:nvSpPr>
-          <p:cNvPr id="1955797739" name="Rectangle 155402662"/>
+          <p:cNvPr id="1547041417" name="Rectangle 155402662"/>
           <p:cNvSpPr txBox="1"/>
           <p:nvPr/>
         </p:nvSpPr>
         <p:spPr bwMode="auto">
           <a:xfrm rot="0" flipH="0" flipV="0">
-            <a:off x="3657600" y="6273799"/>
+            <a:off x="3454399" y="6273798"/>
             <a:ext cx="1219199" cy="406399"/>
           </a:xfrm>
           <a:prstGeom prst="rect">
@@ -7096,7 +7096,7 @@
           <a:noFill/>
         </p:spPr>
         <p:txBody>
-          <a:bodyPr vertOverflow="overflow" horzOverflow="overflow" vert="horz" wrap="square" lIns="45720" tIns="45720" rIns="45720" bIns="45720" numCol="1" spcCol="0" rtlCol="0" fromWordArt="0" anchor="ctr" anchorCtr="0" forceAA="0" upright="0" compatLnSpc="0">
+          <a:bodyPr vertOverflow="overflow" horzOverflow="overflow" vert="horz" wrap="square" lIns="45720" tIns="45720" rIns="45720" bIns="45720" numCol="1" spcCol="0" rtlCol="0" fromWordArt="0" anchor="b" anchorCtr="0" forceAA="0" upright="0" compatLnSpc="0">
             <a:noAutofit/>
           </a:bodyPr>
           <a:p>
@@ -7129,14 +7129,14 @@
       </p:sp>
       <p:sp>
         <p:nvSpPr>
-          <p:cNvPr id="877139311" name=""/>
+          <p:cNvPr id="493679715" name=""/>
           <p:cNvSpPr/>
           <p:nvPr/>
         </p:nvSpPr>
         <p:spPr bwMode="auto">
           <a:xfrm rot="0" flipH="0" flipV="0">
-            <a:off x="4876799" y="6273798"/>
-            <a:ext cx="203199" cy="406399"/>
+            <a:off x="4876799" y="6273799"/>
+            <a:ext cx="406399" cy="101599"/>
           </a:xfrm>
           <a:prstGeom prst="rect">
             <a:avLst/>
@@ -7169,13 +7169,13 @@
       </p:sp>
       <p:sp>
         <p:nvSpPr>
-          <p:cNvPr id="824066637" name="Rectangle 155402662"/>
+          <p:cNvPr id="1269517700" name="Rectangle 155402662"/>
           <p:cNvSpPr txBox="1"/>
           <p:nvPr/>
         </p:nvSpPr>
         <p:spPr bwMode="auto">
           <a:xfrm rot="0" flipH="0" flipV="0">
-            <a:off x="5079999" y="6273799"/>
+            <a:off x="4876799" y="6273798"/>
             <a:ext cx="1219199" cy="406399"/>
           </a:xfrm>
           <a:prstGeom prst="rect">
@@ -7184,7 +7184,7 @@
           <a:noFill/>
         </p:spPr>
         <p:txBody>
-          <a:bodyPr vertOverflow="overflow" horzOverflow="overflow" vert="horz" wrap="square" lIns="45720" tIns="45720" rIns="45720" bIns="45720" numCol="1" spcCol="0" rtlCol="0" fromWordArt="0" anchor="ctr" anchorCtr="0" forceAA="0" upright="0" compatLnSpc="0">
+          <a:bodyPr vertOverflow="overflow" horzOverflow="overflow" vert="horz" wrap="square" lIns="45720" tIns="45720" rIns="45720" bIns="45720" numCol="1" spcCol="0" rtlCol="0" fromWordArt="0" anchor="b" anchorCtr="0" forceAA="0" upright="0" compatLnSpc="0">
             <a:noAutofit/>
           </a:bodyPr>
           <a:p>
@@ -7205,14 +7205,14 @@
       </p:sp>
       <p:sp>
         <p:nvSpPr>
-          <p:cNvPr id="520399650" name=""/>
+          <p:cNvPr id="345691025" name=""/>
           <p:cNvSpPr/>
           <p:nvPr/>
         </p:nvSpPr>
         <p:spPr bwMode="auto">
           <a:xfrm rot="0" flipH="0" flipV="0">
-            <a:off x="6299198" y="6273798"/>
-            <a:ext cx="203199" cy="406399"/>
+            <a:off x="6299198" y="6273799"/>
+            <a:ext cx="406399" cy="101599"/>
           </a:xfrm>
           <a:prstGeom prst="rect">
             <a:avLst/>
@@ -7245,13 +7245,13 @@
       </p:sp>
       <p:sp>
         <p:nvSpPr>
-          <p:cNvPr id="1630311733" name="Rectangle 155402662"/>
+          <p:cNvPr id="859543007" name="Rectangle 155402662"/>
           <p:cNvSpPr txBox="1"/>
           <p:nvPr/>
         </p:nvSpPr>
         <p:spPr bwMode="auto">
           <a:xfrm rot="0" flipH="0" flipV="0">
-            <a:off x="6502398" y="6273799"/>
+            <a:off x="6299198" y="6273798"/>
             <a:ext cx="2031997" cy="406399"/>
           </a:xfrm>
           <a:prstGeom prst="rect">
@@ -7260,7 +7260,7 @@
           <a:noFill/>
         </p:spPr>
         <p:txBody>
-          <a:bodyPr vertOverflow="overflow" horzOverflow="overflow" vert="horz" wrap="square" lIns="45720" tIns="45720" rIns="45720" bIns="45720" numCol="1" spcCol="0" rtlCol="0" fromWordArt="0" anchor="ctr" anchorCtr="0" forceAA="0" upright="0" compatLnSpc="0">
+          <a:bodyPr vertOverflow="overflow" horzOverflow="overflow" vert="horz" wrap="square" lIns="45720" tIns="45720" rIns="45720" bIns="45720" numCol="1" spcCol="0" rtlCol="0" fromWordArt="0" anchor="b" anchorCtr="0" forceAA="0" upright="0" compatLnSpc="0">
             <a:noAutofit/>
           </a:bodyPr>
           <a:p>
@@ -7279,6 +7279,84 @@
           </a:p>
         </p:txBody>
       </p:sp>
+      <p:cxnSp>
+        <p:nvCxnSpPr>
+          <p:cNvPr id="238776927" name=""/>
+          <p:cNvCxnSpPr/>
+          <p:nvPr/>
+        </p:nvCxnSpPr>
+        <p:spPr bwMode="auto">
+          <a:xfrm flipH="0" flipV="0">
+            <a:off x="10363196" y="3429000"/>
+            <a:ext cx="1219197" cy="360"/>
+          </a:xfrm>
+          <a:prstGeom prst="line">
+            <a:avLst/>
+          </a:prstGeom>
+          <a:ln w="12700" cap="flat" cmpd="sng" algn="ctr">
+            <a:solidFill>
+              <a:schemeClr val="tx2"/>
+            </a:solidFill>
+            <a:prstDash val="solid"/>
+            <a:miter lim="800000"/>
+          </a:ln>
+        </p:spPr>
+        <p:style>
+          <a:lnRef idx="1">
+            <a:schemeClr val="accent1">
+              <a:shade val="50000"/>
+            </a:schemeClr>
+          </a:lnRef>
+          <a:fillRef idx="0">
+            <a:schemeClr val="accent1"/>
+          </a:fillRef>
+          <a:effectRef idx="0">
+            <a:schemeClr val="accent1"/>
+          </a:effectRef>
+          <a:fontRef idx="minor">
+            <a:schemeClr val="tx1"/>
+          </a:fontRef>
+        </p:style>
+      </p:cxnSp>
+      <p:cxnSp>
+        <p:nvCxnSpPr>
+          <p:cNvPr id="709801599" name=""/>
+          <p:cNvCxnSpPr/>
+          <p:nvPr/>
+        </p:nvCxnSpPr>
+        <p:spPr bwMode="auto">
+          <a:xfrm rot="0" flipH="0" flipV="0">
+            <a:off x="8737596" y="3429178"/>
+            <a:ext cx="1161141" cy="0"/>
+          </a:xfrm>
+          <a:prstGeom prst="line">
+            <a:avLst/>
+          </a:prstGeom>
+          <a:ln w="12700" cap="flat" cmpd="sng" algn="ctr">
+            <a:solidFill>
+              <a:schemeClr val="bg2"/>
+            </a:solidFill>
+            <a:prstDash val="solid"/>
+            <a:miter lim="800000"/>
+          </a:ln>
+        </p:spPr>
+        <p:style>
+          <a:lnRef idx="1">
+            <a:schemeClr val="accent1">
+              <a:shade val="50000"/>
+            </a:schemeClr>
+          </a:lnRef>
+          <a:fillRef idx="0">
+            <a:schemeClr val="accent1"/>
+          </a:fillRef>
+          <a:effectRef idx="0">
+            <a:schemeClr val="accent1"/>
+          </a:effectRef>
+          <a:fontRef idx="minor">
+            <a:schemeClr val="tx1"/>
+          </a:fontRef>
+        </p:style>
+      </p:cxnSp>
     </p:spTree>
   </p:cSld>
   <p:clrMapOvr>
@@ -7314,7 +7392,7 @@
       </p:grpSpPr>
       <p:sp>
         <p:nvSpPr>
-          <p:cNvPr id="1292914767" name=""/>
+          <p:cNvPr id="1329063343" name=""/>
           <p:cNvSpPr/>
           <p:nvPr/>
         </p:nvSpPr>
@@ -7365,7 +7443,7 @@
       </p:sp>
       <p:sp>
         <p:nvSpPr>
-          <p:cNvPr id="1309094519" name="Title 1"/>
+          <p:cNvPr id="914364281" name="Title 1"/>
           <p:cNvSpPr>
             <a:spLocks noGrp="1"/>
           </p:cNvSpPr>
@@ -7413,7 +7491,7 @@
       </p:sp>
       <p:sp>
         <p:nvSpPr>
-          <p:cNvPr id="420237024" name="Footer Placeholder 4"/>
+          <p:cNvPr id="562888280" name="Footer Placeholder 4"/>
           <p:cNvSpPr>
             <a:spLocks noGrp="1"/>
           </p:cNvSpPr>
@@ -7457,7 +7535,7 @@
       </p:sp>
       <p:sp>
         <p:nvSpPr>
-          <p:cNvPr id="1738287054" name="Slide Number Placeholder 5"/>
+          <p:cNvPr id="1580001809" name="Slide Number Placeholder 5"/>
           <p:cNvSpPr>
             <a:spLocks noGrp="1"/>
           </p:cNvSpPr>
@@ -7487,7 +7565,7 @@
       </p:sp>
       <p:cxnSp>
         <p:nvCxnSpPr>
-          <p:cNvPr id="1793681393" name=""/>
+          <p:cNvPr id="67762574" name=""/>
           <p:cNvCxnSpPr/>
           <p:nvPr/>
         </p:nvCxnSpPr>
@@ -7526,7 +7604,7 @@
       </p:cxnSp>
       <p:cxnSp>
         <p:nvCxnSpPr>
-          <p:cNvPr id="1519012359" name=""/>
+          <p:cNvPr id="2037945289" name=""/>
           <p:cNvCxnSpPr/>
           <p:nvPr/>
         </p:nvCxnSpPr>
@@ -7565,7 +7643,7 @@
       </p:cxnSp>
       <p:sp>
         <p:nvSpPr>
-          <p:cNvPr id="1596555794" name=""/>
+          <p:cNvPr id="102734757" name=""/>
           <p:cNvSpPr txBox="1"/>
           <p:nvPr/>
         </p:nvSpPr>
@@ -7605,7 +7683,7 @@
       </p:sp>
       <p:sp>
         <p:nvSpPr>
-          <p:cNvPr id="97969002" name=""/>
+          <p:cNvPr id="360259295" name=""/>
           <p:cNvSpPr txBox="1"/>
           <p:nvPr/>
         </p:nvSpPr>
@@ -7645,7 +7723,7 @@
       </p:sp>
       <p:sp>
         <p:nvSpPr>
-          <p:cNvPr id="1626875541" name=""/>
+          <p:cNvPr id="1692865074" name=""/>
           <p:cNvSpPr/>
           <p:nvPr/>
         </p:nvSpPr>
@@ -7698,7 +7776,7 @@
       </p:sp>
       <p:cxnSp>
         <p:nvCxnSpPr>
-          <p:cNvPr id="1872947004" name=""/>
+          <p:cNvPr id="1100340344" name=""/>
           <p:cNvCxnSpPr/>
           <p:nvPr/>
         </p:nvCxnSpPr>
@@ -7737,7 +7815,7 @@
       </p:cxnSp>
       <p:cxnSp>
         <p:nvCxnSpPr>
-          <p:cNvPr id="798930360" name=""/>
+          <p:cNvPr id="305365754" name=""/>
           <p:cNvCxnSpPr/>
           <p:nvPr/>
         </p:nvCxnSpPr>
@@ -7776,7 +7854,7 @@
       </p:cxnSp>
       <p:cxnSp>
         <p:nvCxnSpPr>
-          <p:cNvPr id="933701385" name=""/>
+          <p:cNvPr id="1974391877" name=""/>
           <p:cNvCxnSpPr/>
           <p:nvPr/>
         </p:nvCxnSpPr>
@@ -7815,7 +7893,7 @@
       </p:cxnSp>
       <p:cxnSp>
         <p:nvCxnSpPr>
-          <p:cNvPr id="1957795394" name=""/>
+          <p:cNvPr id="382239064" name=""/>
           <p:cNvCxnSpPr/>
           <p:nvPr/>
         </p:nvCxnSpPr>
@@ -7854,7 +7932,7 @@
       </p:cxnSp>
       <p:cxnSp>
         <p:nvCxnSpPr>
-          <p:cNvPr id="881520935" name=""/>
+          <p:cNvPr id="1852617329" name=""/>
           <p:cNvCxnSpPr/>
           <p:nvPr/>
         </p:nvCxnSpPr>
@@ -7893,7 +7971,7 @@
       </p:cxnSp>
       <p:sp>
         <p:nvSpPr>
-          <p:cNvPr id="1889920352" name="gross_profit_y1"/>
+          <p:cNvPr id="722480592" name="gross_profit_3"/>
           <p:cNvSpPr txBox="1"/>
           <p:nvPr/>
         </p:nvSpPr>
@@ -7912,7 +7990,7 @@
             <a:noAutofit/>
           </a:bodyPr>
           <a:p>
-            <a:pPr>
+            <a:pPr algn="ctr">
               <a:defRPr/>
             </a:pPr>
             <a:r>
@@ -7932,7 +8010,7 @@
       </p:sp>
       <p:sp>
         <p:nvSpPr>
-          <p:cNvPr id="1409730380" name="operating_profit_y1"/>
+          <p:cNvPr id="973835866" name="operating_profit_3"/>
           <p:cNvSpPr txBox="1"/>
           <p:nvPr/>
         </p:nvSpPr>
@@ -7951,7 +8029,7 @@
             <a:noAutofit/>
           </a:bodyPr>
           <a:p>
-            <a:pPr>
+            <a:pPr algn="ctr">
               <a:defRPr/>
             </a:pPr>
             <a:r>
@@ -7971,7 +8049,7 @@
       </p:sp>
       <p:sp>
         <p:nvSpPr>
-          <p:cNvPr id="1278452279" name="invested_capital_y1"/>
+          <p:cNvPr id="1994024075" name="invested_capital_3"/>
           <p:cNvSpPr txBox="1"/>
           <p:nvPr/>
         </p:nvSpPr>
@@ -7990,7 +8068,7 @@
             <a:noAutofit/>
           </a:bodyPr>
           <a:p>
-            <a:pPr>
+            <a:pPr algn="ctr">
               <a:defRPr/>
             </a:pPr>
             <a:r>
@@ -8010,7 +8088,7 @@
       </p:sp>
       <p:sp>
         <p:nvSpPr>
-          <p:cNvPr id="10753960" name="debt_y1"/>
+          <p:cNvPr id="787885092" name="debt_3"/>
           <p:cNvSpPr txBox="1"/>
           <p:nvPr/>
         </p:nvSpPr>
@@ -8029,7 +8107,7 @@
             <a:noAutofit/>
           </a:bodyPr>
           <a:p>
-            <a:pPr>
+            <a:pPr algn="ctr">
               <a:defRPr/>
             </a:pPr>
             <a:r>
@@ -8049,7 +8127,7 @@
       </p:sp>
       <p:sp>
         <p:nvSpPr>
-          <p:cNvPr id="1375927863" name="op_cash_flow_y1"/>
+          <p:cNvPr id="2047556773" name="operating_cash_flow_3"/>
           <p:cNvSpPr txBox="1"/>
           <p:nvPr/>
         </p:nvSpPr>
@@ -8068,7 +8146,7 @@
             <a:noAutofit/>
           </a:bodyPr>
           <a:p>
-            <a:pPr>
+            <a:pPr algn="ctr">
               <a:defRPr/>
             </a:pPr>
             <a:r>
@@ -8088,7 +8166,7 @@
       </p:sp>
       <p:sp>
         <p:nvSpPr>
-          <p:cNvPr id="299829238" name="capex_y1"/>
+          <p:cNvPr id="1070831357" name="investing_cash_flow_3"/>
           <p:cNvSpPr txBox="1"/>
           <p:nvPr/>
         </p:nvSpPr>
@@ -8107,7 +8185,7 @@
             <a:noAutofit/>
           </a:bodyPr>
           <a:p>
-            <a:pPr>
+            <a:pPr algn="ctr">
               <a:defRPr/>
             </a:pPr>
             <a:r>
@@ -8127,7 +8205,7 @@
       </p:sp>
       <p:sp>
         <p:nvSpPr>
-          <p:cNvPr id="1753957830" name="net_income_y1"/>
+          <p:cNvPr id="1765006977" name="net_income_3"/>
           <p:cNvSpPr txBox="1"/>
           <p:nvPr/>
         </p:nvSpPr>
@@ -8146,7 +8224,7 @@
             <a:noAutofit/>
           </a:bodyPr>
           <a:p>
-            <a:pPr>
+            <a:pPr algn="ctr">
               <a:defRPr/>
             </a:pPr>
             <a:r>
@@ -8166,7 +8244,7 @@
       </p:sp>
       <p:cxnSp>
         <p:nvCxnSpPr>
-          <p:cNvPr id="255445284" name=""/>
+          <p:cNvPr id="309624000" name=""/>
           <p:cNvCxnSpPr/>
           <p:nvPr/>
         </p:nvCxnSpPr>
@@ -8205,7 +8283,7 @@
       </p:cxnSp>
       <p:cxnSp>
         <p:nvCxnSpPr>
-          <p:cNvPr id="1213364724" name=""/>
+          <p:cNvPr id="2054278777" name=""/>
           <p:cNvCxnSpPr/>
           <p:nvPr/>
         </p:nvCxnSpPr>
@@ -8244,7 +8322,7 @@
       </p:cxnSp>
       <p:sp>
         <p:nvSpPr>
-          <p:cNvPr id="696790418" name="revenue_y1"/>
+          <p:cNvPr id="872913169" name="revenue_3"/>
           <p:cNvSpPr txBox="1"/>
           <p:nvPr/>
         </p:nvSpPr>
@@ -8284,7 +8362,7 @@
       </p:sp>
       <p:cxnSp>
         <p:nvCxnSpPr>
-          <p:cNvPr id="1334909870" name=""/>
+          <p:cNvPr id="1241230653" name=""/>
           <p:cNvCxnSpPr/>
           <p:nvPr/>
         </p:nvCxnSpPr>
@@ -8323,7 +8401,7 @@
       </p:cxnSp>
       <p:sp>
         <p:nvSpPr>
-          <p:cNvPr id="664183" name=""/>
+          <p:cNvPr id="2130541880" name=""/>
           <p:cNvSpPr txBox="1"/>
           <p:nvPr/>
         </p:nvSpPr>
@@ -8363,7 +8441,7 @@
       </p:sp>
       <p:sp>
         <p:nvSpPr>
-          <p:cNvPr id="554334193" name=""/>
+          <p:cNvPr id="1400590071" name=""/>
           <p:cNvSpPr txBox="1"/>
           <p:nvPr/>
         </p:nvSpPr>
@@ -8403,7 +8481,7 @@
       </p:sp>
       <p:sp>
         <p:nvSpPr>
-          <p:cNvPr id="112995139" name=""/>
+          <p:cNvPr id="12269056" name=""/>
           <p:cNvSpPr txBox="1"/>
           <p:nvPr/>
         </p:nvSpPr>
@@ -8443,7 +8521,7 @@
       </p:sp>
       <p:sp>
         <p:nvSpPr>
-          <p:cNvPr id="206307003" name=""/>
+          <p:cNvPr id="1677001035" name=""/>
           <p:cNvSpPr txBox="1"/>
           <p:nvPr/>
         </p:nvSpPr>
@@ -8483,7 +8561,7 @@
       </p:sp>
       <p:sp>
         <p:nvSpPr>
-          <p:cNvPr id="1891046954" name=""/>
+          <p:cNvPr id="587800738" name=""/>
           <p:cNvSpPr txBox="1"/>
           <p:nvPr/>
         </p:nvSpPr>
@@ -8523,7 +8601,7 @@
       </p:sp>
       <p:sp>
         <p:nvSpPr>
-          <p:cNvPr id="218505736" name=""/>
+          <p:cNvPr id="1012693405" name=""/>
           <p:cNvSpPr txBox="1"/>
           <p:nvPr/>
         </p:nvSpPr>
@@ -8563,7 +8641,7 @@
       </p:sp>
       <p:sp>
         <p:nvSpPr>
-          <p:cNvPr id="861080129" name=""/>
+          <p:cNvPr id="1231464476" name=""/>
           <p:cNvSpPr txBox="1"/>
           <p:nvPr/>
         </p:nvSpPr>
@@ -8603,7 +8681,7 @@
       </p:sp>
       <p:cxnSp>
         <p:nvCxnSpPr>
-          <p:cNvPr id="102239739" name=""/>
+          <p:cNvPr id="1978049645" name=""/>
           <p:cNvCxnSpPr/>
           <p:nvPr/>
         </p:nvCxnSpPr>
@@ -8642,7 +8720,7 @@
       </p:cxnSp>
       <p:cxnSp>
         <p:nvCxnSpPr>
-          <p:cNvPr id="1415493402" name=""/>
+          <p:cNvPr id="2056547111" name=""/>
           <p:cNvCxnSpPr/>
           <p:nvPr/>
         </p:nvCxnSpPr>
@@ -8681,7 +8759,7 @@
       </p:cxnSp>
       <p:cxnSp>
         <p:nvCxnSpPr>
-          <p:cNvPr id="713711363" name=""/>
+          <p:cNvPr id="2023756445" name=""/>
           <p:cNvCxnSpPr/>
           <p:nvPr/>
         </p:nvCxnSpPr>
@@ -8720,7 +8798,7 @@
       </p:cxnSp>
       <p:cxnSp>
         <p:nvCxnSpPr>
-          <p:cNvPr id="1035828652" name=""/>
+          <p:cNvPr id="1054799787" name=""/>
           <p:cNvCxnSpPr/>
           <p:nvPr/>
         </p:nvCxnSpPr>
@@ -8759,7 +8837,7 @@
       </p:cxnSp>
       <p:cxnSp>
         <p:nvCxnSpPr>
-          <p:cNvPr id="36907740" name=""/>
+          <p:cNvPr id="126397484" name=""/>
           <p:cNvCxnSpPr/>
           <p:nvPr/>
         </p:nvCxnSpPr>
@@ -8798,7 +8876,7 @@
       </p:cxnSp>
       <p:cxnSp>
         <p:nvCxnSpPr>
-          <p:cNvPr id="1515264621" name=""/>
+          <p:cNvPr id="2060444985" name=""/>
           <p:cNvCxnSpPr/>
           <p:nvPr/>
         </p:nvCxnSpPr>
@@ -8837,7 +8915,7 @@
       </p:cxnSp>
       <p:sp>
         <p:nvSpPr>
-          <p:cNvPr id="2009122375" name=""/>
+          <p:cNvPr id="1391193368" name=""/>
           <p:cNvSpPr txBox="1"/>
           <p:nvPr/>
         </p:nvSpPr>
@@ -8877,7 +8955,7 @@
       </p:sp>
       <p:sp>
         <p:nvSpPr>
-          <p:cNvPr id="1167212487" name=""/>
+          <p:cNvPr id="172448537" name=""/>
           <p:cNvSpPr txBox="1"/>
           <p:nvPr/>
         </p:nvSpPr>
@@ -8917,7 +8995,7 @@
       </p:sp>
       <p:sp>
         <p:nvSpPr>
-          <p:cNvPr id="106858685" name="free_cash_flow_y1"/>
+          <p:cNvPr id="25147155" name="free_cash_flow_3"/>
           <p:cNvSpPr txBox="1"/>
           <p:nvPr/>
         </p:nvSpPr>
@@ -8936,7 +9014,7 @@
             <a:noAutofit/>
           </a:bodyPr>
           <a:p>
-            <a:pPr>
+            <a:pPr algn="ctr">
               <a:defRPr/>
             </a:pPr>
             <a:r>
@@ -8956,7 +9034,7 @@
       </p:sp>
       <p:cxnSp>
         <p:nvCxnSpPr>
-          <p:cNvPr id="1719271845" name=""/>
+          <p:cNvPr id="814627872" name=""/>
           <p:cNvCxnSpPr/>
           <p:nvPr/>
         </p:nvCxnSpPr>
@@ -8995,7 +9073,7 @@
       </p:cxnSp>
       <p:cxnSp>
         <p:nvCxnSpPr>
-          <p:cNvPr id="1227537975" name=""/>
+          <p:cNvPr id="1316789356" name=""/>
           <p:cNvCxnSpPr/>
           <p:nvPr/>
         </p:nvCxnSpPr>
@@ -9034,7 +9112,7 @@
       </p:cxnSp>
       <p:sp>
         <p:nvSpPr>
-          <p:cNvPr id="1835932935" name="gross_profit_y2"/>
+          <p:cNvPr id="887646055" name="gross_profit_2"/>
           <p:cNvSpPr txBox="1"/>
           <p:nvPr/>
         </p:nvSpPr>
@@ -9053,7 +9131,7 @@
             <a:noAutofit/>
           </a:bodyPr>
           <a:p>
-            <a:pPr>
+            <a:pPr algn="ctr">
               <a:defRPr/>
             </a:pPr>
             <a:r>
@@ -9073,7 +9151,7 @@
       </p:sp>
       <p:sp>
         <p:nvSpPr>
-          <p:cNvPr id="2048785509" name="operating_profit_y2"/>
+          <p:cNvPr id="1927299186" name="operating_profit_2"/>
           <p:cNvSpPr txBox="1"/>
           <p:nvPr/>
         </p:nvSpPr>
@@ -9092,7 +9170,7 @@
             <a:noAutofit/>
           </a:bodyPr>
           <a:p>
-            <a:pPr>
+            <a:pPr algn="ctr">
               <a:defRPr/>
             </a:pPr>
             <a:r>
@@ -9112,7 +9190,7 @@
       </p:sp>
       <p:sp>
         <p:nvSpPr>
-          <p:cNvPr id="1687173623" name="invested_capital_y2"/>
+          <p:cNvPr id="1345885988" name="invested_capital_2"/>
           <p:cNvSpPr txBox="1"/>
           <p:nvPr/>
         </p:nvSpPr>
@@ -9131,7 +9209,7 @@
             <a:noAutofit/>
           </a:bodyPr>
           <a:p>
-            <a:pPr>
+            <a:pPr algn="ctr">
               <a:defRPr/>
             </a:pPr>
             <a:r>
@@ -9151,7 +9229,7 @@
       </p:sp>
       <p:sp>
         <p:nvSpPr>
-          <p:cNvPr id="1168283346" name="debt_y2"/>
+          <p:cNvPr id="1150786876" name="debt_2"/>
           <p:cNvSpPr txBox="1"/>
           <p:nvPr/>
         </p:nvSpPr>
@@ -9170,7 +9248,7 @@
             <a:noAutofit/>
           </a:bodyPr>
           <a:p>
-            <a:pPr>
+            <a:pPr algn="ctr">
               <a:defRPr/>
             </a:pPr>
             <a:r>
@@ -9190,7 +9268,7 @@
       </p:sp>
       <p:sp>
         <p:nvSpPr>
-          <p:cNvPr id="42753854" name="op_cash_flow_y2"/>
+          <p:cNvPr id="717498186" name="operating_cash_flow_2"/>
           <p:cNvSpPr txBox="1"/>
           <p:nvPr/>
         </p:nvSpPr>
@@ -9209,7 +9287,7 @@
             <a:noAutofit/>
           </a:bodyPr>
           <a:p>
-            <a:pPr>
+            <a:pPr algn="ctr">
               <a:defRPr/>
             </a:pPr>
             <a:r>
@@ -9229,7 +9307,7 @@
       </p:sp>
       <p:sp>
         <p:nvSpPr>
-          <p:cNvPr id="1995265732" name="capex_y2"/>
+          <p:cNvPr id="397420753" name="investing_cash_flow_2"/>
           <p:cNvSpPr txBox="1"/>
           <p:nvPr/>
         </p:nvSpPr>
@@ -9248,7 +9326,7 @@
             <a:noAutofit/>
           </a:bodyPr>
           <a:p>
-            <a:pPr>
+            <a:pPr algn="ctr">
               <a:defRPr/>
             </a:pPr>
             <a:r>
@@ -9268,7 +9346,7 @@
       </p:sp>
       <p:sp>
         <p:nvSpPr>
-          <p:cNvPr id="2070078947" name="net_income_y2"/>
+          <p:cNvPr id="1106116301" name="net_income_2"/>
           <p:cNvSpPr txBox="1"/>
           <p:nvPr/>
         </p:nvSpPr>
@@ -9287,7 +9365,7 @@
             <a:noAutofit/>
           </a:bodyPr>
           <a:p>
-            <a:pPr>
+            <a:pPr algn="ctr">
               <a:defRPr/>
             </a:pPr>
             <a:r>
@@ -9307,7 +9385,7 @@
       </p:sp>
       <p:sp>
         <p:nvSpPr>
-          <p:cNvPr id="1654097799" name="revenue_y2"/>
+          <p:cNvPr id="1290857094" name="revenue_2"/>
           <p:cNvSpPr txBox="1"/>
           <p:nvPr/>
         </p:nvSpPr>
@@ -9347,7 +9425,7 @@
       </p:sp>
       <p:sp>
         <p:nvSpPr>
-          <p:cNvPr id="514632071" name="free_cash_flow_y2"/>
+          <p:cNvPr id="178523586" name="free_cash_flow_2"/>
           <p:cNvSpPr txBox="1"/>
           <p:nvPr/>
         </p:nvSpPr>
@@ -9366,7 +9444,7 @@
             <a:noAutofit/>
           </a:bodyPr>
           <a:p>
-            <a:pPr>
+            <a:pPr algn="ctr">
               <a:defRPr/>
             </a:pPr>
             <a:r>
@@ -9386,7 +9464,7 @@
       </p:sp>
       <p:sp>
         <p:nvSpPr>
-          <p:cNvPr id="752040717" name="gross_profit_y3"/>
+          <p:cNvPr id="235067489" name="gross_profit_1"/>
           <p:cNvSpPr txBox="1"/>
           <p:nvPr/>
         </p:nvSpPr>
@@ -9405,7 +9483,7 @@
             <a:noAutofit/>
           </a:bodyPr>
           <a:p>
-            <a:pPr>
+            <a:pPr algn="ctr">
               <a:defRPr/>
             </a:pPr>
             <a:r>
@@ -9425,7 +9503,7 @@
       </p:sp>
       <p:sp>
         <p:nvSpPr>
-          <p:cNvPr id="2079312962" name="operating_profit_y3"/>
+          <p:cNvPr id="12746059" name="operating_profit_1"/>
           <p:cNvSpPr txBox="1"/>
           <p:nvPr/>
         </p:nvSpPr>
@@ -9444,7 +9522,7 @@
             <a:noAutofit/>
           </a:bodyPr>
           <a:p>
-            <a:pPr>
+            <a:pPr algn="ctr">
               <a:defRPr/>
             </a:pPr>
             <a:r>
@@ -9464,7 +9542,7 @@
       </p:sp>
       <p:sp>
         <p:nvSpPr>
-          <p:cNvPr id="674360137" name="invested_capital_y3"/>
+          <p:cNvPr id="403024889" name="invested_capital_1"/>
           <p:cNvSpPr txBox="1"/>
           <p:nvPr/>
         </p:nvSpPr>
@@ -9483,7 +9561,7 @@
             <a:noAutofit/>
           </a:bodyPr>
           <a:p>
-            <a:pPr>
+            <a:pPr algn="ctr">
               <a:defRPr/>
             </a:pPr>
             <a:r>
@@ -9503,7 +9581,7 @@
       </p:sp>
       <p:sp>
         <p:nvSpPr>
-          <p:cNvPr id="1386309982" name="debt_y3"/>
+          <p:cNvPr id="1478712940" name="debt_1"/>
           <p:cNvSpPr txBox="1"/>
           <p:nvPr/>
         </p:nvSpPr>
@@ -9522,7 +9600,7 @@
             <a:noAutofit/>
           </a:bodyPr>
           <a:p>
-            <a:pPr>
+            <a:pPr algn="ctr">
               <a:defRPr/>
             </a:pPr>
             <a:r>
@@ -9542,7 +9620,7 @@
       </p:sp>
       <p:sp>
         <p:nvSpPr>
-          <p:cNvPr id="808400469" name="op_cash_flow_y3"/>
+          <p:cNvPr id="330393320" name="operating_cash_flow_1"/>
           <p:cNvSpPr txBox="1"/>
           <p:nvPr/>
         </p:nvSpPr>
@@ -9561,7 +9639,7 @@
             <a:noAutofit/>
           </a:bodyPr>
           <a:p>
-            <a:pPr>
+            <a:pPr algn="ctr">
               <a:defRPr/>
             </a:pPr>
             <a:r>
@@ -9581,7 +9659,7 @@
       </p:sp>
       <p:sp>
         <p:nvSpPr>
-          <p:cNvPr id="1222834766" name="capex_y3"/>
+          <p:cNvPr id="1434671651" name="investing_cash_flow_1"/>
           <p:cNvSpPr txBox="1"/>
           <p:nvPr/>
         </p:nvSpPr>
@@ -9600,7 +9678,7 @@
             <a:noAutofit/>
           </a:bodyPr>
           <a:p>
-            <a:pPr>
+            <a:pPr algn="ctr">
               <a:defRPr/>
             </a:pPr>
             <a:r>
@@ -9620,7 +9698,7 @@
       </p:sp>
       <p:sp>
         <p:nvSpPr>
-          <p:cNvPr id="527905178" name="net_income_y3"/>
+          <p:cNvPr id="114433002" name="net_income_1"/>
           <p:cNvSpPr txBox="1"/>
           <p:nvPr/>
         </p:nvSpPr>
@@ -9639,7 +9717,7 @@
             <a:noAutofit/>
           </a:bodyPr>
           <a:p>
-            <a:pPr>
+            <a:pPr algn="ctr">
               <a:defRPr/>
             </a:pPr>
             <a:r>
@@ -9659,7 +9737,7 @@
       </p:sp>
       <p:sp>
         <p:nvSpPr>
-          <p:cNvPr id="1549065891" name="revenue_y3"/>
+          <p:cNvPr id="471811861" name="revenue_1"/>
           <p:cNvSpPr txBox="1"/>
           <p:nvPr/>
         </p:nvSpPr>
@@ -9699,7 +9777,7 @@
       </p:sp>
       <p:sp>
         <p:nvSpPr>
-          <p:cNvPr id="732437449" name="free_cash_flow_y3"/>
+          <p:cNvPr id="1685837180" name="free_cash_flow_1"/>
           <p:cNvSpPr txBox="1"/>
           <p:nvPr/>
         </p:nvSpPr>
@@ -9718,7 +9796,7 @@
             <a:noAutofit/>
           </a:bodyPr>
           <a:p>
-            <a:pPr>
+            <a:pPr algn="ctr">
               <a:defRPr/>
             </a:pPr>
             <a:r>
@@ -9738,7 +9816,7 @@
       </p:sp>
       <p:sp>
         <p:nvSpPr>
-          <p:cNvPr id="553042685" name="year_1"/>
+          <p:cNvPr id="1428776930" name="year_3"/>
           <p:cNvSpPr txBox="1"/>
           <p:nvPr/>
         </p:nvSpPr>
@@ -9778,7 +9856,7 @@
       </p:sp>
       <p:sp>
         <p:nvSpPr>
-          <p:cNvPr id="357426208" name="year_2"/>
+          <p:cNvPr id="359279346" name="year_2"/>
           <p:cNvSpPr txBox="1"/>
           <p:nvPr/>
         </p:nvSpPr>
@@ -9818,7 +9896,7 @@
       </p:sp>
       <p:sp>
         <p:nvSpPr>
-          <p:cNvPr id="1339678867" name="year_3"/>
+          <p:cNvPr id="1790504187" name="year_1"/>
           <p:cNvSpPr txBox="1"/>
           <p:nvPr/>
         </p:nvSpPr>
@@ -9858,7 +9936,7 @@
       </p:sp>
       <p:sp>
         <p:nvSpPr>
-          <p:cNvPr id="2124968575" name="gross_profit_detail"/>
+          <p:cNvPr id="392674136" name="gross_profit_m"/>
           <p:cNvSpPr txBox="1"/>
           <p:nvPr/>
         </p:nvSpPr>
@@ -9898,7 +9976,7 @@
       </p:sp>
       <p:sp>
         <p:nvSpPr>
-          <p:cNvPr id="38339533" name="operating_profit_detail"/>
+          <p:cNvPr id="275255159" name="operating_profit_m"/>
           <p:cNvSpPr txBox="1"/>
           <p:nvPr/>
         </p:nvSpPr>
@@ -9938,7 +10016,7 @@
       </p:sp>
       <p:sp>
         <p:nvSpPr>
-          <p:cNvPr id="1224916753" name="invested_capital_detail"/>
+          <p:cNvPr id="873429630" name="invested_capital_m"/>
           <p:cNvSpPr txBox="1"/>
           <p:nvPr/>
         </p:nvSpPr>
@@ -9981,7 +10059,7 @@
       </p:sp>
       <p:sp>
         <p:nvSpPr>
-          <p:cNvPr id="169518604" name="debt_detail"/>
+          <p:cNvPr id="1988920844" name="debt_m"/>
           <p:cNvSpPr txBox="1"/>
           <p:nvPr/>
         </p:nvSpPr>
@@ -10024,7 +10102,7 @@
       </p:sp>
       <p:sp>
         <p:nvSpPr>
-          <p:cNvPr id="1201902020" name="op_cash_flow_detail"/>
+          <p:cNvPr id="169843706" name="operating_cash_flow_m"/>
           <p:cNvSpPr txBox="1"/>
           <p:nvPr/>
         </p:nvSpPr>
@@ -10067,7 +10145,7 @@
       </p:sp>
       <p:sp>
         <p:nvSpPr>
-          <p:cNvPr id="968672833" name="capex_detail"/>
+          <p:cNvPr id="575981410" name="investing_cash_flow_m"/>
           <p:cNvSpPr txBox="1"/>
           <p:nvPr/>
         </p:nvSpPr>
@@ -10110,7 +10188,7 @@
       </p:sp>
       <p:sp>
         <p:nvSpPr>
-          <p:cNvPr id="1422078190" name="net_income_detail"/>
+          <p:cNvPr id="780970848" name="net_income_m"/>
           <p:cNvSpPr txBox="1"/>
           <p:nvPr/>
         </p:nvSpPr>
@@ -10153,7 +10231,7 @@
       </p:sp>
       <p:sp>
         <p:nvSpPr>
-          <p:cNvPr id="64225491" name="revenue_detail"/>
+          <p:cNvPr id="928798890" name="revenue_m"/>
           <p:cNvSpPr txBox="1"/>
           <p:nvPr/>
         </p:nvSpPr>
@@ -10193,7 +10271,7 @@
       </p:sp>
       <p:sp>
         <p:nvSpPr>
-          <p:cNvPr id="1998130435" name="free_cash_flow_detail"/>
+          <p:cNvPr id="1885457984" name="free_cash_flow_m"/>
           <p:cNvSpPr txBox="1"/>
           <p:nvPr/>
         </p:nvSpPr>
@@ -10236,7 +10314,7 @@
       </p:sp>
       <p:sp>
         <p:nvSpPr>
-          <p:cNvPr id="1473833356" name="name"/>
+          <p:cNvPr id="1188113094" name="name"/>
           <p:cNvSpPr txBox="1"/>
           <p:nvPr/>
         </p:nvSpPr>
@@ -10264,7 +10342,7 @@
                   <a:schemeClr val="tx2"/>
                 </a:solidFill>
               </a:rPr>
-              <a:t>Averages</a:t>
+              <a:t>Key insight</a:t>
             </a:r>
             <a:endParaRPr sz="1400" b="1">
               <a:solidFill>
@@ -10276,7 +10354,7 @@
       </p:sp>
       <p:sp>
         <p:nvSpPr>
-          <p:cNvPr id="1411254663" name="name"/>
+          <p:cNvPr id="1588593765" name="name"/>
           <p:cNvSpPr txBox="1"/>
           <p:nvPr/>
         </p:nvSpPr>
@@ -10316,7 +10394,7 @@
       </p:sp>
       <p:sp>
         <p:nvSpPr>
-          <p:cNvPr id="1684273404" name=""/>
+          <p:cNvPr id="229711284" name=""/>
           <p:cNvSpPr/>
           <p:nvPr/>
         </p:nvSpPr>
@@ -10367,7 +10445,7 @@
       </p:sp>
       <p:sp>
         <p:nvSpPr>
-          <p:cNvPr id="1068037337" name="comment_1"/>
+          <p:cNvPr id="789817586" name="comment_1"/>
           <p:cNvSpPr/>
           <p:nvPr/>
         </p:nvSpPr>
@@ -10433,7 +10511,7 @@
       </p:sp>
       <p:sp>
         <p:nvSpPr>
-          <p:cNvPr id="1172281257" name=""/>
+          <p:cNvPr id="646002317" name=""/>
           <p:cNvSpPr/>
           <p:nvPr/>
         </p:nvSpPr>
@@ -10484,7 +10562,7 @@
       </p:sp>
       <p:sp>
         <p:nvSpPr>
-          <p:cNvPr id="752332906" name="comment_2"/>
+          <p:cNvPr id="2125324393" name="comment_2"/>
           <p:cNvSpPr/>
           <p:nvPr/>
         </p:nvSpPr>
@@ -10550,7 +10628,7 @@
       </p:sp>
       <p:sp>
         <p:nvSpPr>
-          <p:cNvPr id="1987157095" name=""/>
+          <p:cNvPr id="121291845" name=""/>
           <p:cNvSpPr/>
           <p:nvPr/>
         </p:nvSpPr>
@@ -10601,7 +10679,7 @@
       </p:sp>
       <p:sp>
         <p:nvSpPr>
-          <p:cNvPr id="1883759539" name="comment_3"/>
+          <p:cNvPr id="1833679478" name="comment_3"/>
           <p:cNvSpPr/>
           <p:nvPr/>
         </p:nvSpPr>
@@ -10667,7 +10745,7 @@
       </p:sp>
       <p:sp>
         <p:nvSpPr>
-          <p:cNvPr id="1983128677" name="symbol"/>
+          <p:cNvPr id="2098471398" name="symbol"/>
           <p:cNvSpPr txBox="1"/>
           <p:nvPr/>
         </p:nvSpPr>
@@ -10707,7 +10785,7 @@
       </p:sp>
       <p:sp>
         <p:nvSpPr>
-          <p:cNvPr id="324863765" name="sector"/>
+          <p:cNvPr id="678155250" name="sector"/>
           <p:cNvSpPr txBox="1"/>
           <p:nvPr/>
         </p:nvSpPr>
@@ -10747,7 +10825,7 @@
       </p:sp>
       <p:sp>
         <p:nvSpPr>
-          <p:cNvPr id="1999998772" name="market_cap"/>
+          <p:cNvPr id="644179736" name="market_cap"/>
           <p:cNvSpPr txBox="1"/>
           <p:nvPr/>
         </p:nvSpPr>
@@ -10787,7 +10865,7 @@
       </p:sp>
       <p:sp>
         <p:nvSpPr>
-          <p:cNvPr id="798974197" name="earnings"/>
+          <p:cNvPr id="1249398816" name="earnings"/>
           <p:cNvSpPr txBox="1"/>
           <p:nvPr/>
         </p:nvSpPr>
@@ -10827,7 +10905,7 @@
       </p:sp>
       <p:sp>
         <p:nvSpPr>
-          <p:cNvPr id="2078183806" name="stock_price"/>
+          <p:cNvPr id="433939966" name="stock_price"/>
           <p:cNvSpPr txBox="1"/>
           <p:nvPr/>
         </p:nvSpPr>
@@ -10867,7 +10945,7 @@
       </p:sp>
       <p:sp>
         <p:nvSpPr>
-          <p:cNvPr id="1531127550" name="analyst_rating"/>
+          <p:cNvPr id="876730112" name="analyst_rating"/>
           <p:cNvSpPr txBox="1"/>
           <p:nvPr/>
         </p:nvSpPr>
@@ -10907,7 +10985,7 @@
       </p:sp>
       <p:sp>
         <p:nvSpPr>
-          <p:cNvPr id="1342038714" name="industry"/>
+          <p:cNvPr id="878139496" name="industry"/>
           <p:cNvSpPr txBox="1"/>
           <p:nvPr/>
         </p:nvSpPr>
@@ -10947,7 +11025,7 @@
       </p:sp>
       <p:sp>
         <p:nvSpPr>
-          <p:cNvPr id="2057303460" name="name"/>
+          <p:cNvPr id="365808224" name="name"/>
           <p:cNvSpPr txBox="1"/>
           <p:nvPr/>
         </p:nvSpPr>
@@ -10987,7 +11065,7 @@
       </p:sp>
       <p:sp>
         <p:nvSpPr>
-          <p:cNvPr id="1053024990" name="beta"/>
+          <p:cNvPr id="255756735" name="beta"/>
           <p:cNvSpPr txBox="1"/>
           <p:nvPr/>
         </p:nvSpPr>
@@ -11060,7 +11138,7 @@
       </p:grpSpPr>
       <p:sp>
         <p:nvSpPr>
-          <p:cNvPr id="1210408958" name="Title 1"/>
+          <p:cNvPr id="1134844352" name="Title 1"/>
           <p:cNvSpPr>
             <a:spLocks noGrp="1"/>
           </p:cNvSpPr>
@@ -11115,7 +11193,7 @@
       </p:sp>
       <p:sp>
         <p:nvSpPr>
-          <p:cNvPr id="1272178194" name="Footer Placeholder 4"/>
+          <p:cNvPr id="2004763294" name="Footer Placeholder 4"/>
           <p:cNvSpPr>
             <a:spLocks noGrp="1"/>
           </p:cNvSpPr>
@@ -11149,7 +11227,7 @@
       </p:sp>
       <p:sp>
         <p:nvSpPr>
-          <p:cNvPr id="1268406761" name="Slide Number Placeholder 5"/>
+          <p:cNvPr id="2006905597" name="Slide Number Placeholder 5"/>
           <p:cNvSpPr>
             <a:spLocks noGrp="1"/>
           </p:cNvSpPr>
@@ -11179,7 +11257,7 @@
       </p:sp>
       <p:cxnSp>
         <p:nvCxnSpPr>
-          <p:cNvPr id="262420538" name=""/>
+          <p:cNvPr id="2016570538" name=""/>
           <p:cNvCxnSpPr/>
           <p:nvPr/>
         </p:nvCxnSpPr>
@@ -11218,7 +11296,7 @@
       </p:cxnSp>
       <p:sp>
         <p:nvSpPr>
-          <p:cNvPr id="1219062794" name=""/>
+          <p:cNvPr id="1350521005" name=""/>
           <p:cNvSpPr txBox="1"/>
           <p:nvPr/>
         </p:nvSpPr>
@@ -11258,7 +11336,7 @@
       </p:sp>
       <p:cxnSp>
         <p:nvCxnSpPr>
-          <p:cNvPr id="1761703532" name=""/>
+          <p:cNvPr id="1549148" name=""/>
           <p:cNvCxnSpPr/>
           <p:nvPr/>
         </p:nvCxnSpPr>
@@ -11297,7 +11375,7 @@
       </p:cxnSp>
       <p:sp>
         <p:nvSpPr>
-          <p:cNvPr id="117818953" name="news_name_1"/>
+          <p:cNvPr id="716350874" name="news_name_1"/>
           <p:cNvSpPr/>
           <p:nvPr/>
         </p:nvSpPr>
@@ -11359,7 +11437,7 @@
       </p:sp>
       <p:sp>
         <p:nvSpPr>
-          <p:cNvPr id="852312331" name="news_1"/>
+          <p:cNvPr id="906087781" name="news_1"/>
           <p:cNvSpPr/>
           <p:nvPr/>
         </p:nvSpPr>
@@ -11425,7 +11503,7 @@
       </p:sp>
       <p:sp>
         <p:nvSpPr>
-          <p:cNvPr id="1175610084" name="news_name_2"/>
+          <p:cNvPr id="109753580" name="news_name_2"/>
           <p:cNvSpPr/>
           <p:nvPr/>
         </p:nvSpPr>
@@ -11487,7 +11565,7 @@
       </p:sp>
       <p:sp>
         <p:nvSpPr>
-          <p:cNvPr id="1795734628" name="news_2"/>
+          <p:cNvPr id="1859707664" name="news_2"/>
           <p:cNvSpPr/>
           <p:nvPr/>
         </p:nvSpPr>
@@ -11549,7 +11627,7 @@
       </p:sp>
       <p:sp>
         <p:nvSpPr>
-          <p:cNvPr id="1822665920" name="news_name_3"/>
+          <p:cNvPr id="512455155" name="news_name_3"/>
           <p:cNvSpPr/>
           <p:nvPr/>
         </p:nvSpPr>
@@ -11611,7 +11689,7 @@
       </p:sp>
       <p:sp>
         <p:nvSpPr>
-          <p:cNvPr id="901644133" name="news_3"/>
+          <p:cNvPr id="1011798944" name="news_3"/>
           <p:cNvSpPr/>
           <p:nvPr/>
         </p:nvSpPr>
